--- a/项目路演ppt-第四组2.0.pptx
+++ b/项目路演ppt-第四组2.0.pptx
@@ -5,7 +5,7 @@
     <p:sldMasterId id="2147483648" r:id="rId1"/>
   </p:sldMasterIdLst>
   <p:notesMasterIdLst>
-    <p:notesMasterId r:id="rId13"/>
+    <p:notesMasterId r:id="rId15"/>
   </p:notesMasterIdLst>
   <p:sldIdLst>
     <p:sldId id="256" r:id="rId2"/>
@@ -17,8 +17,10 @@
     <p:sldId id="262" r:id="rId8"/>
     <p:sldId id="263" r:id="rId9"/>
     <p:sldId id="268" r:id="rId10"/>
-    <p:sldId id="264" r:id="rId11"/>
-    <p:sldId id="267" r:id="rId12"/>
+    <p:sldId id="269" r:id="rId11"/>
+    <p:sldId id="264" r:id="rId12"/>
+    <p:sldId id="270" r:id="rId13"/>
+    <p:sldId id="267" r:id="rId14"/>
   </p:sldIdLst>
   <p:sldSz cx="12192000" cy="6858000"/>
   <p:notesSz cx="6858000" cy="9144000"/>
@@ -378,6 +380,112 @@
   <p:cSld>
     <p:spTree>
       <p:nvGrpSpPr>
+        <p:cNvPr id="1" name="">
+          <a:extLst>
+            <a:ext uri="{FF2B5EF4-FFF2-40B4-BE49-F238E27FC236}">
+              <a16:creationId xmlns:a16="http://schemas.microsoft.com/office/drawing/2014/main" id="{CD9B9772-232F-2A7D-FE84-D796BD948A7C}"/>
+            </a:ext>
+          </a:extLst>
+        </p:cNvPr>
+        <p:cNvGrpSpPr/>
+        <p:nvPr/>
+      </p:nvGrpSpPr>
+      <p:grpSpPr>
+        <a:xfrm>
+          <a:off x="0" y="0"/>
+          <a:ext cx="0" cy="0"/>
+          <a:chOff x="0" y="0"/>
+          <a:chExt cx="0" cy="0"/>
+        </a:xfrm>
+      </p:grpSpPr>
+      <p:sp>
+        <p:nvSpPr>
+          <p:cNvPr id="2" name="Slide Image Placeholder 1">
+            <a:extLst>
+              <a:ext uri="{FF2B5EF4-FFF2-40B4-BE49-F238E27FC236}">
+                <a16:creationId xmlns:a16="http://schemas.microsoft.com/office/drawing/2014/main" id="{D630D694-6319-3E33-4827-CDEB7FB1E659}"/>
+              </a:ext>
+            </a:extLst>
+          </p:cNvPr>
+          <p:cNvSpPr>
+            <a:spLocks noGrp="1" noRot="1" noChangeAspect="1"/>
+          </p:cNvSpPr>
+          <p:nvPr>
+            <p:ph type="sldImg"/>
+          </p:nvPr>
+        </p:nvSpPr>
+        <p:spPr/>
+      </p:sp>
+      <p:sp>
+        <p:nvSpPr>
+          <p:cNvPr id="3" name="Notes Placeholder 2">
+            <a:extLst>
+              <a:ext uri="{FF2B5EF4-FFF2-40B4-BE49-F238E27FC236}">
+                <a16:creationId xmlns:a16="http://schemas.microsoft.com/office/drawing/2014/main" id="{E20ECD76-E82B-D5A3-DEDD-336402906227}"/>
+              </a:ext>
+            </a:extLst>
+          </p:cNvPr>
+          <p:cNvSpPr>
+            <a:spLocks noGrp="1"/>
+          </p:cNvSpPr>
+          <p:nvPr>
+            <p:ph type="body" idx="1"/>
+          </p:nvPr>
+        </p:nvSpPr>
+        <p:spPr/>
+        <p:txBody>
+          <a:bodyPr/>
+          <a:lstStyle/>
+          <a:p>
+            <a:r>
+              <a:t>答辩提示：根据本页标题先讲结论，再结合流程或截图说明实现。图片占位框内的文字是建议截取的内容，补图时保留版式比例。</a:t>
+            </a:r>
+          </a:p>
+        </p:txBody>
+      </p:sp>
+      <p:sp>
+        <p:nvSpPr>
+          <p:cNvPr id="4" name="Slide Number Placeholder 3">
+            <a:extLst>
+              <a:ext uri="{FF2B5EF4-FFF2-40B4-BE49-F238E27FC236}">
+                <a16:creationId xmlns:a16="http://schemas.microsoft.com/office/drawing/2014/main" id="{5C870C78-6ED9-5115-D08A-B5CA12F585D7}"/>
+              </a:ext>
+            </a:extLst>
+          </p:cNvPr>
+          <p:cNvSpPr>
+            <a:spLocks noGrp="1"/>
+          </p:cNvSpPr>
+          <p:nvPr>
+            <p:ph type="sldNum" idx="5"/>
+          </p:nvPr>
+        </p:nvSpPr>
+        <p:spPr/>
+        <p:txBody>
+          <a:bodyPr/>
+          <a:lstStyle/>
+          <a:p>
+            <a:endParaRPr/>
+          </a:p>
+        </p:txBody>
+      </p:sp>
+    </p:spTree>
+    <p:extLst>
+      <p:ext uri="{BB962C8B-B14F-4D97-AF65-F5344CB8AC3E}">
+        <p14:creationId xmlns:p14="http://schemas.microsoft.com/office/powerpoint/2010/main" val="922417834"/>
+      </p:ext>
+    </p:extLst>
+  </p:cSld>
+  <p:clrMapOvr>
+    <a:masterClrMapping/>
+  </p:clrMapOvr>
+</p:notes>
+</file>
+
+<file path=ppt/notesSlides/notesSlide11.xml><?xml version="1.0" encoding="utf-8"?>
+<p:notes xmlns:a="http://schemas.openxmlformats.org/drawingml/2006/main" xmlns:r="http://schemas.openxmlformats.org/officeDocument/2006/relationships" xmlns:p="http://schemas.openxmlformats.org/presentationml/2006/main">
+  <p:cSld>
+    <p:spTree>
+      <p:nvGrpSpPr>
         <p:cNvPr id="1" name=""/>
         <p:cNvGrpSpPr/>
         <p:nvPr/>
@@ -450,7 +558,84 @@
 </p:notes>
 </file>
 
-<file path=ppt/notesSlides/notesSlide11.xml><?xml version="1.0" encoding="utf-8"?>
+<file path=ppt/notesSlides/notesSlide12.xml><?xml version="1.0" encoding="utf-8"?>
+<p:notes xmlns:a="http://schemas.openxmlformats.org/drawingml/2006/main" xmlns:r="http://schemas.openxmlformats.org/officeDocument/2006/relationships" xmlns:p="http://schemas.openxmlformats.org/presentationml/2006/main">
+  <p:cSld>
+    <p:spTree>
+      <p:nvGrpSpPr>
+        <p:cNvPr id="1" name=""/>
+        <p:cNvGrpSpPr/>
+        <p:nvPr/>
+      </p:nvGrpSpPr>
+      <p:grpSpPr>
+        <a:xfrm>
+          <a:off x="0" y="0"/>
+          <a:ext cx="0" cy="0"/>
+          <a:chOff x="0" y="0"/>
+          <a:chExt cx="0" cy="0"/>
+        </a:xfrm>
+      </p:grpSpPr>
+      <p:sp>
+        <p:nvSpPr>
+          <p:cNvPr id="2" name="Slide Image Placeholder 1"/>
+          <p:cNvSpPr>
+            <a:spLocks noGrp="1" noRot="1" noChangeAspect="1"/>
+          </p:cNvSpPr>
+          <p:nvPr>
+            <p:ph type="sldImg"/>
+          </p:nvPr>
+        </p:nvSpPr>
+        <p:spPr/>
+      </p:sp>
+      <p:sp>
+        <p:nvSpPr>
+          <p:cNvPr id="3" name="Notes Placeholder 2"/>
+          <p:cNvSpPr>
+            <a:spLocks noGrp="1"/>
+          </p:cNvSpPr>
+          <p:nvPr>
+            <p:ph type="body" idx="1"/>
+          </p:nvPr>
+        </p:nvSpPr>
+        <p:spPr/>
+        <p:txBody>
+          <a:bodyPr/>
+          <a:lstStyle/>
+          <a:p>
+            <a:r>
+              <a:t>答辩提示：本项目中较耗时的部分是统一开发环境和多人联调。我们通过固定依赖版本、维护 API 文档、按 Model、Service、Page 分层并采用小步提交，逐步减少重复排查和合并返工。</a:t>
+            </a:r>
+          </a:p>
+        </p:txBody>
+      </p:sp>
+      <p:sp>
+        <p:nvSpPr>
+          <p:cNvPr id="4" name="Slide Number Placeholder 3"/>
+          <p:cNvSpPr>
+            <a:spLocks noGrp="1"/>
+          </p:cNvSpPr>
+          <p:nvPr>
+            <p:ph type="sldNum" idx="5"/>
+          </p:nvPr>
+        </p:nvSpPr>
+        <p:spPr/>
+        <p:txBody>
+          <a:bodyPr/>
+          <a:lstStyle/>
+          <a:p>
+            <a:endParaRPr/>
+          </a:p>
+        </p:txBody>
+      </p:sp>
+    </p:spTree>
+  </p:cSld>
+  <p:clrMapOvr>
+    <a:masterClrMapping/>
+  </p:clrMapOvr>
+</p:notes>
+</file>
+
+<file path=ppt/notesSlides/notesSlide13.xml><?xml version="1.0" encoding="utf-8"?>
 <p:notes xmlns:a="http://schemas.openxmlformats.org/drawingml/2006/main" xmlns:r="http://schemas.openxmlformats.org/officeDocument/2006/relationships" xmlns:p="http://schemas.openxmlformats.org/presentationml/2006/main">
   <p:cSld>
     <p:spTree>
@@ -2053,6 +2238,732 @@
     </p:bg>
     <p:spTree>
       <p:nvGrpSpPr>
+        <p:cNvPr id="1" name="">
+          <a:extLst>
+            <a:ext uri="{FF2B5EF4-FFF2-40B4-BE49-F238E27FC236}">
+              <a16:creationId xmlns:a16="http://schemas.microsoft.com/office/drawing/2014/main" id="{783C1FD0-8EF2-58C4-31B1-D0A9AFB84340}"/>
+            </a:ext>
+          </a:extLst>
+        </p:cNvPr>
+        <p:cNvGrpSpPr/>
+        <p:nvPr/>
+      </p:nvGrpSpPr>
+      <p:grpSpPr>
+        <a:xfrm>
+          <a:off x="0" y="0"/>
+          <a:ext cx="0" cy="0"/>
+          <a:chOff x="0" y="0"/>
+          <a:chExt cx="0" cy="0"/>
+        </a:xfrm>
+      </p:grpSpPr>
+      <p:sp>
+        <p:nvSpPr>
+          <p:cNvPr id="23" name="矩形 22">
+            <a:extLst>
+              <a:ext uri="{FF2B5EF4-FFF2-40B4-BE49-F238E27FC236}">
+                <a16:creationId xmlns:a16="http://schemas.microsoft.com/office/drawing/2014/main" id="{10378863-2926-2B12-0A79-7BC3B1BB9C04}"/>
+              </a:ext>
+            </a:extLst>
+          </p:cNvPr>
+          <p:cNvSpPr>
+            <a:spLocks noGrp="1"/>
+          </p:cNvSpPr>
+          <p:nvPr/>
+        </p:nvSpPr>
+        <p:spPr>
+          <a:xfrm>
+            <a:off x="609600" y="361950"/>
+            <a:ext cx="3429000" cy="190500"/>
+          </a:xfrm>
+          <a:prstGeom prst="rect">
+            <a:avLst/>
+          </a:prstGeom>
+          <a:noFill/>
+          <a:ln w="0">
+            <a:noFill/>
+            <a:prstDash val="solid"/>
+          </a:ln>
+        </p:spPr>
+        <p:txBody>
+          <a:bodyPr/>
+          <a:lstStyle/>
+          <a:p>
+            <a:pPr algn="l">
+              <a:defRPr sz="975" b="1">
+                <a:solidFill>
+                  <a:srgbClr val="FF6B35"/>
+                </a:solidFill>
+                <a:latin typeface="Arial"/>
+                <a:ea typeface="Arial"/>
+                <a:cs typeface="Arial"/>
+              </a:defRPr>
+            </a:pPr>
+            <a:r>
+              <a:rPr sz="975" b="1">
+                <a:solidFill>
+                  <a:srgbClr val="FF6B35"/>
+                </a:solidFill>
+                <a:latin typeface="Arial"/>
+                <a:ea typeface="Arial"/>
+                <a:cs typeface="Arial"/>
+              </a:rPr>
+              <a:t>GALE VERDICT / ADMIN CLIENT</a:t>
+            </a:r>
+          </a:p>
+        </p:txBody>
+      </p:sp>
+      <p:sp>
+        <p:nvSpPr>
+          <p:cNvPr id="2" name="矩形 1">
+            <a:extLst>
+              <a:ext uri="{FF2B5EF4-FFF2-40B4-BE49-F238E27FC236}">
+                <a16:creationId xmlns:a16="http://schemas.microsoft.com/office/drawing/2014/main" id="{F3A0F857-1665-EADD-FB89-13A42AAD6755}"/>
+              </a:ext>
+            </a:extLst>
+          </p:cNvPr>
+          <p:cNvSpPr>
+            <a:spLocks noGrp="1"/>
+          </p:cNvSpPr>
+          <p:nvPr/>
+        </p:nvSpPr>
+        <p:spPr>
+          <a:xfrm>
+            <a:off x="609600" y="666750"/>
+            <a:ext cx="9144000" cy="514350"/>
+          </a:xfrm>
+          <a:prstGeom prst="rect">
+            <a:avLst/>
+          </a:prstGeom>
+          <a:noFill/>
+          <a:ln w="0">
+            <a:noFill/>
+            <a:prstDash val="solid"/>
+          </a:ln>
+        </p:spPr>
+        <p:txBody>
+          <a:bodyPr/>
+          <a:lstStyle/>
+          <a:p>
+            <a:pPr algn="l">
+              <a:defRPr sz="2550" b="1">
+                <a:solidFill>
+                  <a:srgbClr val="FFFFFF"/>
+                </a:solidFill>
+                <a:latin typeface="Arial"/>
+                <a:ea typeface="Arial"/>
+                <a:cs typeface="Arial"/>
+              </a:defRPr>
+            </a:pPr>
+            <a:r>
+              <a:rPr lang="zh-CN" altLang="en-US" sz="2550" b="1" dirty="0">
+                <a:solidFill>
+                  <a:srgbClr val="FFFFFF"/>
+                </a:solidFill>
+                <a:latin typeface="Arial"/>
+                <a:ea typeface="Arial"/>
+                <a:cs typeface="Arial"/>
+              </a:rPr>
+              <a:t>充电站定位及导航</a:t>
+            </a:r>
+            <a:endParaRPr sz="2550" b="1" dirty="0">
+              <a:solidFill>
+                <a:srgbClr val="FFFFFF"/>
+              </a:solidFill>
+              <a:latin typeface="Arial"/>
+              <a:ea typeface="Arial"/>
+              <a:cs typeface="Arial"/>
+            </a:endParaRPr>
+          </a:p>
+        </p:txBody>
+      </p:sp>
+      <p:sp>
+        <p:nvSpPr>
+          <p:cNvPr id="3" name="矩形 2">
+            <a:extLst>
+              <a:ext uri="{FF2B5EF4-FFF2-40B4-BE49-F238E27FC236}">
+                <a16:creationId xmlns:a16="http://schemas.microsoft.com/office/drawing/2014/main" id="{40A56656-DC54-B79C-1AF2-CF99F9F68F10}"/>
+              </a:ext>
+            </a:extLst>
+          </p:cNvPr>
+          <p:cNvSpPr>
+            <a:spLocks noGrp="1"/>
+          </p:cNvSpPr>
+          <p:nvPr/>
+        </p:nvSpPr>
+        <p:spPr>
+          <a:xfrm>
+            <a:off x="10953750" y="400050"/>
+            <a:ext cx="590550" cy="323850"/>
+          </a:xfrm>
+          <a:prstGeom prst="rect">
+            <a:avLst/>
+          </a:prstGeom>
+          <a:noFill/>
+          <a:ln w="0">
+            <a:noFill/>
+            <a:prstDash val="solid"/>
+          </a:ln>
+        </p:spPr>
+        <p:txBody>
+          <a:bodyPr/>
+          <a:lstStyle/>
+          <a:p>
+            <a:pPr algn="r">
+              <a:defRPr sz="1650" b="1">
+                <a:solidFill>
+                  <a:srgbClr val="00C2A8"/>
+                </a:solidFill>
+                <a:latin typeface="Arial"/>
+                <a:ea typeface="Arial"/>
+                <a:cs typeface="Arial"/>
+              </a:defRPr>
+            </a:pPr>
+            <a:r>
+              <a:rPr sz="1650" b="1">
+                <a:solidFill>
+                  <a:srgbClr val="00C2A8"/>
+                </a:solidFill>
+                <a:latin typeface="Arial"/>
+                <a:ea typeface="Arial"/>
+                <a:cs typeface="Arial"/>
+              </a:rPr>
+              <a:t>08</a:t>
+            </a:r>
+          </a:p>
+        </p:txBody>
+      </p:sp>
+      <p:sp>
+        <p:nvSpPr>
+          <p:cNvPr id="4" name="直接连接符 3">
+            <a:extLst>
+              <a:ext uri="{FF2B5EF4-FFF2-40B4-BE49-F238E27FC236}">
+                <a16:creationId xmlns:a16="http://schemas.microsoft.com/office/drawing/2014/main" id="{599CC29D-378A-25BA-A2CE-8ED119549A74}"/>
+              </a:ext>
+            </a:extLst>
+          </p:cNvPr>
+          <p:cNvSpPr>
+            <a:spLocks noGrp="1"/>
+          </p:cNvSpPr>
+          <p:nvPr/>
+        </p:nvSpPr>
+        <p:spPr>
+          <a:xfrm>
+            <a:off x="609600" y="1314450"/>
+            <a:ext cx="10972800" cy="0"/>
+          </a:xfrm>
+          <a:prstGeom prst="line">
+            <a:avLst/>
+          </a:prstGeom>
+          <a:noFill/>
+          <a:ln w="9525">
+            <a:solidFill>
+              <a:srgbClr val="344249"/>
+            </a:solidFill>
+            <a:prstDash val="solid"/>
+          </a:ln>
+        </p:spPr>
+      </p:sp>
+      <p:sp>
+        <p:nvSpPr>
+          <p:cNvPr id="5" name="矩形: 圆角 4">
+            <a:extLst>
+              <a:ext uri="{FF2B5EF4-FFF2-40B4-BE49-F238E27FC236}">
+                <a16:creationId xmlns:a16="http://schemas.microsoft.com/office/drawing/2014/main" id="{4F409443-AAF2-4210-5770-BCC8CBC63FA7}"/>
+              </a:ext>
+            </a:extLst>
+          </p:cNvPr>
+          <p:cNvSpPr>
+            <a:spLocks noGrp="1"/>
+          </p:cNvSpPr>
+          <p:nvPr/>
+        </p:nvSpPr>
+        <p:spPr>
+          <a:xfrm>
+            <a:off x="657224" y="1613380"/>
+            <a:ext cx="5248275" cy="4325406"/>
+          </a:xfrm>
+          <a:prstGeom prst="roundRect">
+            <a:avLst>
+              <a:gd name="adj" fmla="val 2564"/>
+            </a:avLst>
+          </a:prstGeom>
+          <a:solidFill>
+            <a:srgbClr val="202C32"/>
+          </a:solidFill>
+          <a:ln w="9525">
+            <a:solidFill>
+              <a:srgbClr val="344249"/>
+            </a:solidFill>
+            <a:prstDash val="solid"/>
+          </a:ln>
+        </p:spPr>
+      </p:sp>
+      <p:sp>
+        <p:nvSpPr>
+          <p:cNvPr id="6" name="直接连接符 5">
+            <a:extLst>
+              <a:ext uri="{FF2B5EF4-FFF2-40B4-BE49-F238E27FC236}">
+                <a16:creationId xmlns:a16="http://schemas.microsoft.com/office/drawing/2014/main" id="{BBB8B765-E4F9-D50A-AB25-24E2DB889C4A}"/>
+              </a:ext>
+            </a:extLst>
+          </p:cNvPr>
+          <p:cNvSpPr>
+            <a:spLocks noGrp="1"/>
+          </p:cNvSpPr>
+          <p:nvPr/>
+        </p:nvSpPr>
+        <p:spPr>
+          <a:xfrm>
+            <a:off x="838200" y="1816768"/>
+            <a:ext cx="514350" cy="0"/>
+          </a:xfrm>
+          <a:prstGeom prst="line">
+            <a:avLst/>
+          </a:prstGeom>
+          <a:noFill/>
+          <a:ln w="38100">
+            <a:solidFill>
+              <a:srgbClr val="FF6B35"/>
+            </a:solidFill>
+            <a:prstDash val="solid"/>
+          </a:ln>
+        </p:spPr>
+      </p:sp>
+      <p:sp>
+        <p:nvSpPr>
+          <p:cNvPr id="7" name="矩形 6">
+            <a:extLst>
+              <a:ext uri="{FF2B5EF4-FFF2-40B4-BE49-F238E27FC236}">
+                <a16:creationId xmlns:a16="http://schemas.microsoft.com/office/drawing/2014/main" id="{A619B397-B567-EEBA-E4C2-51D4D81FC9AA}"/>
+              </a:ext>
+            </a:extLst>
+          </p:cNvPr>
+          <p:cNvSpPr>
+            <a:spLocks noGrp="1"/>
+          </p:cNvSpPr>
+          <p:nvPr/>
+        </p:nvSpPr>
+        <p:spPr>
+          <a:xfrm>
+            <a:off x="723900" y="1909613"/>
+            <a:ext cx="4591050" cy="304800"/>
+          </a:xfrm>
+          <a:prstGeom prst="rect">
+            <a:avLst/>
+          </a:prstGeom>
+          <a:noFill/>
+          <a:ln w="0">
+            <a:noFill/>
+            <a:prstDash val="solid"/>
+          </a:ln>
+        </p:spPr>
+        <p:txBody>
+          <a:bodyPr/>
+          <a:lstStyle/>
+          <a:p>
+            <a:pPr algn="l">
+              <a:defRPr sz="1725" b="1">
+                <a:solidFill>
+                  <a:srgbClr val="FFFFFF"/>
+                </a:solidFill>
+                <a:latin typeface="Arial"/>
+                <a:ea typeface="Arial"/>
+                <a:cs typeface="Arial"/>
+              </a:defRPr>
+            </a:pPr>
+            <a:r>
+              <a:rPr lang="zh-CN" altLang="en-US" sz="1725" b="1" dirty="0">
+                <a:solidFill>
+                  <a:srgbClr val="FFFFFF"/>
+                </a:solidFill>
+                <a:latin typeface="Arial"/>
+                <a:ea typeface="Arial"/>
+                <a:cs typeface="Arial"/>
+              </a:rPr>
+              <a:t>管理端添加充电站地址</a:t>
+            </a:r>
+            <a:endParaRPr sz="1725" b="1" dirty="0">
+              <a:solidFill>
+                <a:srgbClr val="FFFFFF"/>
+              </a:solidFill>
+              <a:latin typeface="Arial"/>
+              <a:ea typeface="Arial"/>
+              <a:cs typeface="Arial"/>
+            </a:endParaRPr>
+          </a:p>
+        </p:txBody>
+      </p:sp>
+      <p:sp>
+        <p:nvSpPr>
+          <p:cNvPr id="20" name="直接连接符 19">
+            <a:extLst>
+              <a:ext uri="{FF2B5EF4-FFF2-40B4-BE49-F238E27FC236}">
+                <a16:creationId xmlns:a16="http://schemas.microsoft.com/office/drawing/2014/main" id="{C43DAD69-4D11-DC55-111D-F5479125D9FB}"/>
+              </a:ext>
+            </a:extLst>
+          </p:cNvPr>
+          <p:cNvSpPr>
+            <a:spLocks noGrp="1"/>
+          </p:cNvSpPr>
+          <p:nvPr/>
+        </p:nvSpPr>
+        <p:spPr>
+          <a:xfrm>
+            <a:off x="609600" y="6438900"/>
+            <a:ext cx="10972800" cy="0"/>
+          </a:xfrm>
+          <a:prstGeom prst="line">
+            <a:avLst/>
+          </a:prstGeom>
+          <a:noFill/>
+          <a:ln w="9525">
+            <a:solidFill>
+              <a:srgbClr val="344249"/>
+            </a:solidFill>
+            <a:prstDash val="solid"/>
+          </a:ln>
+        </p:spPr>
+      </p:sp>
+      <p:sp>
+        <p:nvSpPr>
+          <p:cNvPr id="21" name="矩形 20">
+            <a:extLst>
+              <a:ext uri="{FF2B5EF4-FFF2-40B4-BE49-F238E27FC236}">
+                <a16:creationId xmlns:a16="http://schemas.microsoft.com/office/drawing/2014/main" id="{93331435-59BB-923C-B13A-0E8CCDC29B70}"/>
+              </a:ext>
+            </a:extLst>
+          </p:cNvPr>
+          <p:cNvSpPr>
+            <a:spLocks noGrp="1"/>
+          </p:cNvSpPr>
+          <p:nvPr/>
+        </p:nvSpPr>
+        <p:spPr>
+          <a:xfrm>
+            <a:off x="609600" y="6534150"/>
+            <a:ext cx="4572000" cy="171450"/>
+          </a:xfrm>
+          <a:prstGeom prst="rect">
+            <a:avLst/>
+          </a:prstGeom>
+          <a:noFill/>
+          <a:ln w="0">
+            <a:noFill/>
+            <a:prstDash val="solid"/>
+          </a:ln>
+        </p:spPr>
+        <p:txBody>
+          <a:bodyPr/>
+          <a:lstStyle/>
+          <a:p>
+            <a:pPr algn="l">
+              <a:defRPr sz="900" b="0">
+                <a:solidFill>
+                  <a:srgbClr val="AEB9B8"/>
+                </a:solidFill>
+                <a:latin typeface="Arial"/>
+                <a:ea typeface="Arial"/>
+                <a:cs typeface="Arial"/>
+              </a:defRPr>
+            </a:pPr>
+            <a:r>
+              <a:rPr sz="900" b="0">
+                <a:solidFill>
+                  <a:srgbClr val="AEB9B8"/>
+                </a:solidFill>
+                <a:latin typeface="Arial"/>
+                <a:ea typeface="Arial"/>
+                <a:cs typeface="Arial"/>
+              </a:rPr>
+              <a:t>电动汽车充电运营管理平台</a:t>
+            </a:r>
+          </a:p>
+        </p:txBody>
+      </p:sp>
+      <p:sp>
+        <p:nvSpPr>
+          <p:cNvPr id="22" name="矩形 21">
+            <a:extLst>
+              <a:ext uri="{FF2B5EF4-FFF2-40B4-BE49-F238E27FC236}">
+                <a16:creationId xmlns:a16="http://schemas.microsoft.com/office/drawing/2014/main" id="{F38F5500-4DD6-C1F1-0F67-89F734BC8327}"/>
+              </a:ext>
+            </a:extLst>
+          </p:cNvPr>
+          <p:cNvSpPr>
+            <a:spLocks noGrp="1"/>
+          </p:cNvSpPr>
+          <p:nvPr/>
+        </p:nvSpPr>
+        <p:spPr>
+          <a:xfrm>
+            <a:off x="10287000" y="6534150"/>
+            <a:ext cx="1295400" cy="171450"/>
+          </a:xfrm>
+          <a:prstGeom prst="rect">
+            <a:avLst/>
+          </a:prstGeom>
+          <a:noFill/>
+          <a:ln w="0">
+            <a:noFill/>
+            <a:prstDash val="solid"/>
+          </a:ln>
+        </p:spPr>
+        <p:txBody>
+          <a:bodyPr/>
+          <a:lstStyle/>
+          <a:p>
+            <a:pPr algn="r">
+              <a:defRPr sz="900" b="0">
+                <a:solidFill>
+                  <a:srgbClr val="AEB9B8"/>
+                </a:solidFill>
+                <a:latin typeface="Arial"/>
+                <a:ea typeface="Arial"/>
+                <a:cs typeface="Arial"/>
+              </a:defRPr>
+            </a:pPr>
+            <a:r>
+              <a:rPr sz="900" b="0">
+                <a:solidFill>
+                  <a:srgbClr val="AEB9B8"/>
+                </a:solidFill>
+                <a:latin typeface="Arial"/>
+                <a:ea typeface="Arial"/>
+                <a:cs typeface="Arial"/>
+              </a:rPr>
+              <a:t>第四组</a:t>
+            </a:r>
+          </a:p>
+        </p:txBody>
+      </p:sp>
+      <p:sp>
+        <p:nvSpPr>
+          <p:cNvPr id="27" name="矩形: 圆角 26">
+            <a:extLst>
+              <a:ext uri="{FF2B5EF4-FFF2-40B4-BE49-F238E27FC236}">
+                <a16:creationId xmlns:a16="http://schemas.microsoft.com/office/drawing/2014/main" id="{07DDDDB6-7E0E-09D4-649B-79AAFE626B30}"/>
+              </a:ext>
+            </a:extLst>
+          </p:cNvPr>
+          <p:cNvSpPr>
+            <a:spLocks noGrp="1"/>
+          </p:cNvSpPr>
+          <p:nvPr/>
+        </p:nvSpPr>
+        <p:spPr>
+          <a:xfrm>
+            <a:off x="6160269" y="1613380"/>
+            <a:ext cx="2421757" cy="4325406"/>
+          </a:xfrm>
+          <a:prstGeom prst="roundRect">
+            <a:avLst>
+              <a:gd name="adj" fmla="val 2564"/>
+            </a:avLst>
+          </a:prstGeom>
+          <a:solidFill>
+            <a:srgbClr val="202C32"/>
+          </a:solidFill>
+          <a:ln w="9525">
+            <a:solidFill>
+              <a:srgbClr val="344249"/>
+            </a:solidFill>
+            <a:prstDash val="solid"/>
+          </a:ln>
+        </p:spPr>
+      </p:sp>
+      <p:sp>
+        <p:nvSpPr>
+          <p:cNvPr id="29" name="直接连接符 28">
+            <a:extLst>
+              <a:ext uri="{FF2B5EF4-FFF2-40B4-BE49-F238E27FC236}">
+                <a16:creationId xmlns:a16="http://schemas.microsoft.com/office/drawing/2014/main" id="{7F819B6E-9206-5245-5850-DE8981B0ADD3}"/>
+              </a:ext>
+            </a:extLst>
+          </p:cNvPr>
+          <p:cNvSpPr>
+            <a:spLocks noGrp="1"/>
+          </p:cNvSpPr>
+          <p:nvPr/>
+        </p:nvSpPr>
+        <p:spPr>
+          <a:xfrm>
+            <a:off x="6400801" y="1816768"/>
+            <a:ext cx="514350" cy="0"/>
+          </a:xfrm>
+          <a:prstGeom prst="line">
+            <a:avLst/>
+          </a:prstGeom>
+          <a:noFill/>
+          <a:ln w="38100">
+            <a:solidFill>
+              <a:srgbClr val="FF6B35"/>
+            </a:solidFill>
+            <a:prstDash val="solid"/>
+          </a:ln>
+        </p:spPr>
+      </p:sp>
+      <p:sp>
+        <p:nvSpPr>
+          <p:cNvPr id="31" name="矩形 30">
+            <a:extLst>
+              <a:ext uri="{FF2B5EF4-FFF2-40B4-BE49-F238E27FC236}">
+                <a16:creationId xmlns:a16="http://schemas.microsoft.com/office/drawing/2014/main" id="{DAEF9B9C-CCD1-D29E-E215-31CE80E4559B}"/>
+              </a:ext>
+            </a:extLst>
+          </p:cNvPr>
+          <p:cNvSpPr>
+            <a:spLocks noGrp="1"/>
+          </p:cNvSpPr>
+          <p:nvPr/>
+        </p:nvSpPr>
+        <p:spPr>
+          <a:xfrm>
+            <a:off x="6286501" y="1909613"/>
+            <a:ext cx="4591050" cy="304800"/>
+          </a:xfrm>
+          <a:prstGeom prst="rect">
+            <a:avLst/>
+          </a:prstGeom>
+          <a:noFill/>
+          <a:ln w="0">
+            <a:noFill/>
+            <a:prstDash val="solid"/>
+          </a:ln>
+        </p:spPr>
+        <p:txBody>
+          <a:bodyPr/>
+          <a:lstStyle/>
+          <a:p>
+            <a:pPr algn="l">
+              <a:defRPr sz="1725" b="1">
+                <a:solidFill>
+                  <a:srgbClr val="FFFFFF"/>
+                </a:solidFill>
+                <a:latin typeface="Arial"/>
+                <a:ea typeface="Arial"/>
+                <a:cs typeface="Arial"/>
+              </a:defRPr>
+            </a:pPr>
+            <a:r>
+              <a:rPr lang="zh-CN" altLang="en-US" sz="1725" b="1" dirty="0">
+                <a:solidFill>
+                  <a:srgbClr val="FFFFFF"/>
+                </a:solidFill>
+                <a:latin typeface="Arial"/>
+                <a:ea typeface="Arial"/>
+                <a:cs typeface="Arial"/>
+              </a:rPr>
+              <a:t>用户端选择当前地址</a:t>
+            </a:r>
+            <a:endParaRPr sz="1725" b="1" dirty="0">
+              <a:solidFill>
+                <a:srgbClr val="FFFFFF"/>
+              </a:solidFill>
+              <a:latin typeface="Arial"/>
+              <a:ea typeface="Arial"/>
+              <a:cs typeface="Arial"/>
+            </a:endParaRPr>
+          </a:p>
+        </p:txBody>
+      </p:sp>
+      <p:pic>
+        <p:nvPicPr>
+          <p:cNvPr id="10" name="图片 9">
+            <a:extLst>
+              <a:ext uri="{FF2B5EF4-FFF2-40B4-BE49-F238E27FC236}">
+                <a16:creationId xmlns:a16="http://schemas.microsoft.com/office/drawing/2014/main" id="{84E7CE2C-07A5-9873-4B96-8DC40CA3E6D8}"/>
+              </a:ext>
+            </a:extLst>
+          </p:cNvPr>
+          <p:cNvPicPr>
+            <a:picLocks noChangeAspect="1"/>
+          </p:cNvPicPr>
+          <p:nvPr/>
+        </p:nvPicPr>
+        <p:blipFill>
+          <a:blip r:embed="rId3">
+            <a:extLst>
+              <a:ext uri="{28A0092B-C50C-407E-A947-70E740481C1C}">
+                <a14:useLocalDpi xmlns:a14="http://schemas.microsoft.com/office/drawing/2010/main" val="0"/>
+              </a:ext>
+            </a:extLst>
+          </a:blip>
+          <a:stretch>
+            <a:fillRect/>
+          </a:stretch>
+        </p:blipFill>
+        <p:spPr>
+          <a:xfrm>
+            <a:off x="876623" y="2300564"/>
+            <a:ext cx="4809475" cy="3241829"/>
+          </a:xfrm>
+          <a:prstGeom prst="rect">
+            <a:avLst/>
+          </a:prstGeom>
+        </p:spPr>
+      </p:pic>
+      <p:pic>
+        <p:nvPicPr>
+          <p:cNvPr id="13" name="图片 12">
+            <a:extLst>
+              <a:ext uri="{FF2B5EF4-FFF2-40B4-BE49-F238E27FC236}">
+                <a16:creationId xmlns:a16="http://schemas.microsoft.com/office/drawing/2014/main" id="{7D95E379-814F-E376-D088-121386B08F57}"/>
+              </a:ext>
+            </a:extLst>
+          </p:cNvPr>
+          <p:cNvPicPr>
+            <a:picLocks noChangeAspect="1"/>
+          </p:cNvPicPr>
+          <p:nvPr/>
+        </p:nvPicPr>
+        <p:blipFill>
+          <a:blip r:embed="rId4">
+            <a:extLst>
+              <a:ext uri="{28A0092B-C50C-407E-A947-70E740481C1C}">
+                <a14:useLocalDpi xmlns:a14="http://schemas.microsoft.com/office/drawing/2010/main" val="0"/>
+              </a:ext>
+            </a:extLst>
+          </a:blip>
+          <a:stretch>
+            <a:fillRect/>
+          </a:stretch>
+        </p:blipFill>
+        <p:spPr>
+          <a:xfrm>
+            <a:off x="6400801" y="2214414"/>
+            <a:ext cx="1931972" cy="3647780"/>
+          </a:xfrm>
+          <a:prstGeom prst="rect">
+            <a:avLst/>
+          </a:prstGeom>
+        </p:spPr>
+      </p:pic>
+    </p:spTree>
+    <p:extLst>
+      <p:ext uri="{BB962C8B-B14F-4D97-AF65-F5344CB8AC3E}">
+        <p14:creationId xmlns:p14="http://schemas.microsoft.com/office/powerpoint/2010/main" val="2614107298"/>
+      </p:ext>
+    </p:extLst>
+  </p:cSld>
+  <p:clrMapOvr>
+    <a:masterClrMapping/>
+  </p:clrMapOvr>
+</p:sld>
+</file>
+
+<file path=ppt/slides/slide11.xml><?xml version="1.0" encoding="utf-8"?>
+<p:sld xmlns:a="http://schemas.openxmlformats.org/drawingml/2006/main" xmlns:r="http://schemas.openxmlformats.org/officeDocument/2006/relationships" xmlns:p="http://schemas.openxmlformats.org/presentationml/2006/main">
+  <p:cSld>
+    <p:bg>
+      <p:bgPr>
+        <a:solidFill>
+          <a:srgbClr val="10161B"/>
+        </a:solidFill>
+        <a:effectLst/>
+      </p:bgPr>
+    </p:bg>
+    <p:spTree>
+      <p:nvGrpSpPr>
         <p:cNvPr id="1" name=""/>
         <p:cNvGrpSpPr/>
         <p:nvPr/>
@@ -3297,7 +4208,7 @@
                 <a:latin typeface="Arial"/>
                 <a:cs typeface="Arial"/>
               </a:rPr>
-              <a:t> · Drogon · PostgreSQL · HTTP/JSON · WebSocket</a:t>
+              <a:t> · Drogon · PostgreSQL · HTTP/JSON · Socket</a:t>
             </a:r>
           </a:p>
         </p:txBody>
@@ -3643,7 +4554,1730 @@
 </p:sld>
 </file>
 
-<file path=ppt/slides/slide11.xml><?xml version="1.0" encoding="utf-8"?>
+<file path=ppt/slides/slide12.xml><?xml version="1.0" encoding="utf-8"?>
+<p:sld xmlns:a="http://schemas.openxmlformats.org/drawingml/2006/main" xmlns:r="http://schemas.openxmlformats.org/officeDocument/2006/relationships" xmlns:p="http://schemas.openxmlformats.org/presentationml/2006/main">
+  <p:cSld>
+    <p:bg>
+      <p:bgPr>
+        <a:solidFill>
+          <a:schemeClr val="tx1"/>
+        </a:solidFill>
+        <a:effectLst/>
+      </p:bgPr>
+    </p:bg>
+    <p:spTree>
+      <p:nvGrpSpPr>
+        <p:cNvPr id="1" name=""/>
+        <p:cNvGrpSpPr/>
+        <p:nvPr/>
+      </p:nvGrpSpPr>
+      <p:grpSpPr>
+        <a:xfrm>
+          <a:off x="0" y="0"/>
+          <a:ext cx="0" cy="0"/>
+          <a:chOff x="0" y="0"/>
+          <a:chExt cx="0" cy="0"/>
+        </a:xfrm>
+      </p:grpSpPr>
+      <p:sp>
+        <p:nvSpPr>
+          <p:cNvPr id="40" name="challenge-kicker">
+            <a:extLst>
+              <a:ext uri="{FF2B5EF4-FFF2-40B4-BE49-F238E27FC236}">
+                <a16:creationId xmlns:a16="http://schemas.microsoft.com/office/drawing/2014/main" id="{9EF46414-E595-48C0-B82C-579E9C90D40B}"/>
+              </a:ext>
+            </a:extLst>
+          </p:cNvPr>
+          <p:cNvSpPr>
+            <a:spLocks noGrp="1"/>
+          </p:cNvSpPr>
+          <p:nvPr/>
+        </p:nvSpPr>
+        <p:spPr>
+          <a:xfrm>
+            <a:off x="609600" y="361950"/>
+            <a:ext cx="4000500" cy="190500"/>
+          </a:xfrm>
+          <a:prstGeom prst="rect">
+            <a:avLst/>
+          </a:prstGeom>
+          <a:noFill/>
+          <a:ln w="0">
+            <a:noFill/>
+            <a:prstDash val="solid"/>
+          </a:ln>
+        </p:spPr>
+        <p:txBody>
+          <a:bodyPr wrap="square" lIns="0" tIns="0" rIns="0" bIns="0" anchor="ctr">
+            <a:normAutofit fontScale="93371"/>
+          </a:bodyPr>
+          <a:lstStyle/>
+          <a:p>
+            <a:pPr algn="l">
+              <a:lnSpc>
+                <a:spcPct val="105000"/>
+              </a:lnSpc>
+              <a:buNone/>
+              <a:defRPr sz="1275" b="1">
+                <a:solidFill>
+                  <a:srgbClr val="FF6B35"/>
+                </a:solidFill>
+                <a:latin typeface="Arial"/>
+                <a:ea typeface="Arial"/>
+                <a:cs typeface="Arial"/>
+              </a:defRPr>
+            </a:pPr>
+            <a:r>
+              <a:rPr sz="1275" b="1">
+                <a:solidFill>
+                  <a:srgbClr val="FF6B35"/>
+                </a:solidFill>
+                <a:latin typeface="Arial"/>
+                <a:ea typeface="Arial"/>
+                <a:cs typeface="Arial"/>
+              </a:rPr>
+              <a:t>GALE VERDICT / PROJECT REVIEW</a:t>
+            </a:r>
+          </a:p>
+        </p:txBody>
+      </p:sp>
+      <p:sp>
+        <p:nvSpPr>
+          <p:cNvPr id="2" name="challenge-title">
+            <a:extLst>
+              <a:ext uri="{FF2B5EF4-FFF2-40B4-BE49-F238E27FC236}">
+                <a16:creationId xmlns:a16="http://schemas.microsoft.com/office/drawing/2014/main" id="{8353995E-7E4E-4C28-9941-873DF934F5D0}"/>
+              </a:ext>
+            </a:extLst>
+          </p:cNvPr>
+          <p:cNvSpPr>
+            <a:spLocks noGrp="1"/>
+          </p:cNvSpPr>
+          <p:nvPr/>
+        </p:nvSpPr>
+        <p:spPr>
+          <a:xfrm>
+            <a:off x="609600" y="666750"/>
+            <a:ext cx="9144000" cy="514350"/>
+          </a:xfrm>
+          <a:prstGeom prst="rect">
+            <a:avLst/>
+          </a:prstGeom>
+          <a:noFill/>
+          <a:ln w="0">
+            <a:noFill/>
+            <a:prstDash val="solid"/>
+          </a:ln>
+        </p:spPr>
+        <p:txBody>
+          <a:bodyPr wrap="square" lIns="0" tIns="0" rIns="0" bIns="0" anchor="ctr">
+            <a:normAutofit fontScale="95238"/>
+          </a:bodyPr>
+          <a:lstStyle/>
+          <a:p>
+            <a:pPr algn="l">
+              <a:lnSpc>
+                <a:spcPct val="105000"/>
+              </a:lnSpc>
+              <a:buNone/>
+              <a:defRPr sz="3375" b="1">
+                <a:solidFill>
+                  <a:srgbClr val="FFFFFF"/>
+                </a:solidFill>
+                <a:latin typeface="Arial"/>
+                <a:ea typeface="Arial"/>
+                <a:cs typeface="Arial"/>
+              </a:defRPr>
+            </a:pPr>
+            <a:r>
+              <a:rPr sz="3375" b="1">
+                <a:solidFill>
+                  <a:srgbClr val="FFFFFF"/>
+                </a:solidFill>
+                <a:latin typeface="Arial"/>
+                <a:ea typeface="Arial"/>
+                <a:cs typeface="Arial"/>
+              </a:rPr>
+              <a:t>项目挑战与实践收获</a:t>
+            </a:r>
+          </a:p>
+        </p:txBody>
+      </p:sp>
+      <p:sp>
+        <p:nvSpPr>
+          <p:cNvPr id="3" name="challenge-number">
+            <a:extLst>
+              <a:ext uri="{FF2B5EF4-FFF2-40B4-BE49-F238E27FC236}">
+                <a16:creationId xmlns:a16="http://schemas.microsoft.com/office/drawing/2014/main" id="{6FC6C0CF-0FF4-470D-AFD9-80969185CA9D}"/>
+              </a:ext>
+            </a:extLst>
+          </p:cNvPr>
+          <p:cNvSpPr>
+            <a:spLocks noGrp="1"/>
+          </p:cNvSpPr>
+          <p:nvPr/>
+        </p:nvSpPr>
+        <p:spPr>
+          <a:xfrm>
+            <a:off x="10953750" y="400050"/>
+            <a:ext cx="590550" cy="323850"/>
+          </a:xfrm>
+          <a:prstGeom prst="rect">
+            <a:avLst/>
+          </a:prstGeom>
+          <a:noFill/>
+          <a:ln w="0">
+            <a:noFill/>
+            <a:prstDash val="solid"/>
+          </a:ln>
+        </p:spPr>
+        <p:txBody>
+          <a:bodyPr wrap="square" lIns="0" tIns="0" rIns="0" bIns="0" anchor="ctr">
+            <a:normAutofit fontScale="92097" lnSpcReduction="20000"/>
+          </a:bodyPr>
+          <a:lstStyle/>
+          <a:p>
+            <a:pPr algn="r">
+              <a:lnSpc>
+                <a:spcPct val="105000"/>
+              </a:lnSpc>
+              <a:buNone/>
+              <a:defRPr sz="2625" b="1">
+                <a:solidFill>
+                  <a:srgbClr val="08C4B0"/>
+                </a:solidFill>
+                <a:latin typeface="Arial"/>
+                <a:ea typeface="Arial"/>
+                <a:cs typeface="Arial"/>
+              </a:defRPr>
+            </a:pPr>
+            <a:r>
+              <a:rPr sz="2625" b="1">
+                <a:solidFill>
+                  <a:srgbClr val="08C4B0"/>
+                </a:solidFill>
+                <a:latin typeface="Arial"/>
+                <a:ea typeface="Arial"/>
+                <a:cs typeface="Arial"/>
+              </a:rPr>
+              <a:t>10</a:t>
+            </a:r>
+          </a:p>
+        </p:txBody>
+      </p:sp>
+      <p:sp>
+        <p:nvSpPr>
+          <p:cNvPr id="4" name="challenge-header-divider">
+            <a:extLst>
+              <a:ext uri="{FF2B5EF4-FFF2-40B4-BE49-F238E27FC236}">
+                <a16:creationId xmlns:a16="http://schemas.microsoft.com/office/drawing/2014/main" id="{72056657-DAAD-477D-A77D-B7A6D9FE7F43}"/>
+              </a:ext>
+            </a:extLst>
+          </p:cNvPr>
+          <p:cNvSpPr>
+            <a:spLocks noGrp="1"/>
+          </p:cNvSpPr>
+          <p:nvPr/>
+        </p:nvSpPr>
+        <p:spPr>
+          <a:xfrm>
+            <a:off x="609600" y="1314450"/>
+            <a:ext cx="10972800" cy="14288"/>
+          </a:xfrm>
+          <a:prstGeom prst="rect">
+            <a:avLst/>
+          </a:prstGeom>
+          <a:solidFill>
+            <a:srgbClr val="344249"/>
+          </a:solidFill>
+          <a:ln w="0">
+            <a:noFill/>
+            <a:prstDash val="solid"/>
+          </a:ln>
+        </p:spPr>
+      </p:sp>
+      <p:sp>
+        <p:nvSpPr>
+          <p:cNvPr id="5" name="challenge-panel">
+            <a:extLst>
+              <a:ext uri="{FF2B5EF4-FFF2-40B4-BE49-F238E27FC236}">
+                <a16:creationId xmlns:a16="http://schemas.microsoft.com/office/drawing/2014/main" id="{E26238C8-1283-423E-8280-F343FE88C325}"/>
+              </a:ext>
+            </a:extLst>
+          </p:cNvPr>
+          <p:cNvSpPr>
+            <a:spLocks noGrp="1"/>
+          </p:cNvSpPr>
+          <p:nvPr/>
+        </p:nvSpPr>
+        <p:spPr>
+          <a:xfrm>
+            <a:off x="762000" y="1619250"/>
+            <a:ext cx="5143500" cy="3829050"/>
+          </a:xfrm>
+          <a:prstGeom prst="roundRect">
+            <a:avLst>
+              <a:gd name="adj" fmla="val 3483"/>
+            </a:avLst>
+          </a:prstGeom>
+          <a:solidFill>
+            <a:srgbClr val="19232B"/>
+          </a:solidFill>
+          <a:ln w="11430">
+            <a:solidFill>
+              <a:srgbClr val="34454E"/>
+            </a:solidFill>
+            <a:prstDash val="solid"/>
+          </a:ln>
+        </p:spPr>
+      </p:sp>
+      <p:sp>
+        <p:nvSpPr>
+          <p:cNvPr id="6" name="learning-panel">
+            <a:extLst>
+              <a:ext uri="{FF2B5EF4-FFF2-40B4-BE49-F238E27FC236}">
+                <a16:creationId xmlns:a16="http://schemas.microsoft.com/office/drawing/2014/main" id="{E82A768E-F4D6-47AE-A273-CB3EEB56318A}"/>
+              </a:ext>
+            </a:extLst>
+          </p:cNvPr>
+          <p:cNvSpPr>
+            <a:spLocks noGrp="1"/>
+          </p:cNvSpPr>
+          <p:nvPr/>
+        </p:nvSpPr>
+        <p:spPr>
+          <a:xfrm>
+            <a:off x="6286500" y="1619250"/>
+            <a:ext cx="5143500" cy="3829050"/>
+          </a:xfrm>
+          <a:prstGeom prst="roundRect">
+            <a:avLst>
+              <a:gd name="adj" fmla="val 3483"/>
+            </a:avLst>
+          </a:prstGeom>
+          <a:solidFill>
+            <a:srgbClr val="19232B"/>
+          </a:solidFill>
+          <a:ln w="11430">
+            <a:solidFill>
+              <a:srgbClr val="34454E"/>
+            </a:solidFill>
+            <a:prstDash val="solid"/>
+          </a:ln>
+        </p:spPr>
+      </p:sp>
+      <p:sp>
+        <p:nvSpPr>
+          <p:cNvPr id="7" name="challenge-accent">
+            <a:extLst>
+              <a:ext uri="{FF2B5EF4-FFF2-40B4-BE49-F238E27FC236}">
+                <a16:creationId xmlns:a16="http://schemas.microsoft.com/office/drawing/2014/main" id="{AEEBFF13-B15C-4625-A03D-AB32BB230B6C}"/>
+              </a:ext>
+            </a:extLst>
+          </p:cNvPr>
+          <p:cNvSpPr>
+            <a:spLocks noGrp="1"/>
+          </p:cNvSpPr>
+          <p:nvPr/>
+        </p:nvSpPr>
+        <p:spPr>
+          <a:xfrm>
+            <a:off x="990600" y="1828800"/>
+            <a:ext cx="514350" cy="38100"/>
+          </a:xfrm>
+          <a:prstGeom prst="rect">
+            <a:avLst/>
+          </a:prstGeom>
+          <a:solidFill>
+            <a:srgbClr val="FF6B35"/>
+          </a:solidFill>
+          <a:ln w="0">
+            <a:noFill/>
+            <a:prstDash val="solid"/>
+          </a:ln>
+        </p:spPr>
+      </p:sp>
+      <p:sp>
+        <p:nvSpPr>
+          <p:cNvPr id="8" name="learning-accent">
+            <a:extLst>
+              <a:ext uri="{FF2B5EF4-FFF2-40B4-BE49-F238E27FC236}">
+                <a16:creationId xmlns:a16="http://schemas.microsoft.com/office/drawing/2014/main" id="{278862E8-D7A4-4228-9700-921170F08C44}"/>
+              </a:ext>
+            </a:extLst>
+          </p:cNvPr>
+          <p:cNvSpPr>
+            <a:spLocks noGrp="1"/>
+          </p:cNvSpPr>
+          <p:nvPr/>
+        </p:nvSpPr>
+        <p:spPr>
+          <a:xfrm>
+            <a:off x="6515100" y="1828800"/>
+            <a:ext cx="514350" cy="38100"/>
+          </a:xfrm>
+          <a:prstGeom prst="rect">
+            <a:avLst/>
+          </a:prstGeom>
+          <a:solidFill>
+            <a:srgbClr val="08C4B0"/>
+          </a:solidFill>
+          <a:ln w="0">
+            <a:noFill/>
+            <a:prstDash val="solid"/>
+          </a:ln>
+        </p:spPr>
+      </p:sp>
+      <p:sp>
+        <p:nvSpPr>
+          <p:cNvPr id="9" name="challenge-heading">
+            <a:extLst>
+              <a:ext uri="{FF2B5EF4-FFF2-40B4-BE49-F238E27FC236}">
+                <a16:creationId xmlns:a16="http://schemas.microsoft.com/office/drawing/2014/main" id="{7BD603DC-53C3-41E3-BFA2-F69B35834D0F}"/>
+              </a:ext>
+            </a:extLst>
+          </p:cNvPr>
+          <p:cNvSpPr>
+            <a:spLocks noGrp="1"/>
+          </p:cNvSpPr>
+          <p:nvPr/>
+        </p:nvSpPr>
+        <p:spPr>
+          <a:xfrm>
+            <a:off x="990600" y="1943100"/>
+            <a:ext cx="4286250" cy="342900"/>
+          </a:xfrm>
+          <a:prstGeom prst="rect">
+            <a:avLst/>
+          </a:prstGeom>
+          <a:noFill/>
+          <a:ln w="0">
+            <a:noFill/>
+            <a:prstDash val="solid"/>
+          </a:ln>
+        </p:spPr>
+        <p:txBody>
+          <a:bodyPr wrap="square" lIns="0" tIns="0" rIns="0" bIns="0" anchor="ctr">
+            <a:normAutofit fontScale="98522"/>
+          </a:bodyPr>
+          <a:lstStyle/>
+          <a:p>
+            <a:pPr algn="l">
+              <a:lnSpc>
+                <a:spcPct val="105000"/>
+              </a:lnSpc>
+              <a:buNone/>
+              <a:defRPr sz="2175" b="1">
+                <a:solidFill>
+                  <a:srgbClr val="FFFFFF"/>
+                </a:solidFill>
+                <a:latin typeface="Arial"/>
+                <a:ea typeface="Arial"/>
+                <a:cs typeface="Arial"/>
+              </a:defRPr>
+            </a:pPr>
+            <a:r>
+              <a:rPr sz="2175" b="1">
+                <a:solidFill>
+                  <a:srgbClr val="FFFFFF"/>
+                </a:solidFill>
+                <a:latin typeface="Arial"/>
+                <a:ea typeface="Arial"/>
+                <a:cs typeface="Arial"/>
+              </a:rPr>
+              <a:t>项目挑战</a:t>
+            </a:r>
+          </a:p>
+        </p:txBody>
+      </p:sp>
+      <p:sp>
+        <p:nvSpPr>
+          <p:cNvPr id="10" name="learning-heading">
+            <a:extLst>
+              <a:ext uri="{FF2B5EF4-FFF2-40B4-BE49-F238E27FC236}">
+                <a16:creationId xmlns:a16="http://schemas.microsoft.com/office/drawing/2014/main" id="{533B3374-EF53-497F-A516-6CFE1973377D}"/>
+              </a:ext>
+            </a:extLst>
+          </p:cNvPr>
+          <p:cNvSpPr>
+            <a:spLocks noGrp="1"/>
+          </p:cNvSpPr>
+          <p:nvPr/>
+        </p:nvSpPr>
+        <p:spPr>
+          <a:xfrm>
+            <a:off x="6515100" y="1943100"/>
+            <a:ext cx="4286250" cy="342900"/>
+          </a:xfrm>
+          <a:prstGeom prst="rect">
+            <a:avLst/>
+          </a:prstGeom>
+          <a:noFill/>
+          <a:ln w="0">
+            <a:noFill/>
+            <a:prstDash val="solid"/>
+          </a:ln>
+        </p:spPr>
+        <p:txBody>
+          <a:bodyPr wrap="square" lIns="0" tIns="0" rIns="0" bIns="0" anchor="ctr">
+            <a:normAutofit fontScale="98522"/>
+          </a:bodyPr>
+          <a:lstStyle/>
+          <a:p>
+            <a:pPr algn="l">
+              <a:lnSpc>
+                <a:spcPct val="105000"/>
+              </a:lnSpc>
+              <a:buNone/>
+              <a:defRPr sz="2175" b="1">
+                <a:solidFill>
+                  <a:srgbClr val="FFFFFF"/>
+                </a:solidFill>
+                <a:latin typeface="Arial"/>
+                <a:ea typeface="Arial"/>
+                <a:cs typeface="Arial"/>
+              </a:defRPr>
+            </a:pPr>
+            <a:r>
+              <a:rPr sz="2175" b="1">
+                <a:solidFill>
+                  <a:srgbClr val="FFFFFF"/>
+                </a:solidFill>
+                <a:latin typeface="Arial"/>
+                <a:ea typeface="Arial"/>
+                <a:cs typeface="Arial"/>
+              </a:rPr>
+              <a:t>实践收获</a:t>
+            </a:r>
+          </a:p>
+        </p:txBody>
+      </p:sp>
+      <p:sp>
+        <p:nvSpPr>
+          <p:cNvPr id="11" name="challenge-1-dot">
+            <a:extLst>
+              <a:ext uri="{FF2B5EF4-FFF2-40B4-BE49-F238E27FC236}">
+                <a16:creationId xmlns:a16="http://schemas.microsoft.com/office/drawing/2014/main" id="{A3D73613-9BD2-4C4D-B7D7-51A2B6133058}"/>
+              </a:ext>
+            </a:extLst>
+          </p:cNvPr>
+          <p:cNvSpPr>
+            <a:spLocks noGrp="1"/>
+          </p:cNvSpPr>
+          <p:nvPr/>
+        </p:nvSpPr>
+        <p:spPr>
+          <a:xfrm>
+            <a:off x="990600" y="2466975"/>
+            <a:ext cx="95250" cy="95250"/>
+          </a:xfrm>
+          <a:prstGeom prst="ellipse">
+            <a:avLst/>
+          </a:prstGeom>
+          <a:solidFill>
+            <a:srgbClr val="FF6B35"/>
+          </a:solidFill>
+          <a:ln w="0">
+            <a:noFill/>
+            <a:prstDash val="solid"/>
+          </a:ln>
+        </p:spPr>
+      </p:sp>
+      <p:sp>
+        <p:nvSpPr>
+          <p:cNvPr id="12" name="challenge-1-heading">
+            <a:extLst>
+              <a:ext uri="{FF2B5EF4-FFF2-40B4-BE49-F238E27FC236}">
+                <a16:creationId xmlns:a16="http://schemas.microsoft.com/office/drawing/2014/main" id="{853F212B-3BD8-428D-823E-9FDD189535D7}"/>
+              </a:ext>
+            </a:extLst>
+          </p:cNvPr>
+          <p:cNvSpPr>
+            <a:spLocks noGrp="1"/>
+          </p:cNvSpPr>
+          <p:nvPr/>
+        </p:nvSpPr>
+        <p:spPr>
+          <a:xfrm>
+            <a:off x="1219200" y="2400300"/>
+            <a:ext cx="4095750" cy="247650"/>
+          </a:xfrm>
+          <a:prstGeom prst="rect">
+            <a:avLst/>
+          </a:prstGeom>
+          <a:noFill/>
+          <a:ln w="0">
+            <a:noFill/>
+            <a:prstDash val="solid"/>
+          </a:ln>
+        </p:spPr>
+        <p:txBody>
+          <a:bodyPr wrap="square" lIns="0" tIns="0" rIns="0" bIns="0" anchor="ctr">
+            <a:normAutofit fontScale="93795"/>
+          </a:bodyPr>
+          <a:lstStyle/>
+          <a:p>
+            <a:pPr algn="l">
+              <a:lnSpc>
+                <a:spcPct val="105000"/>
+              </a:lnSpc>
+              <a:buNone/>
+              <a:defRPr sz="1650" b="1">
+                <a:solidFill>
+                  <a:srgbClr val="FFFFFF"/>
+                </a:solidFill>
+                <a:latin typeface="Arial"/>
+                <a:ea typeface="Arial"/>
+                <a:cs typeface="Arial"/>
+              </a:defRPr>
+            </a:pPr>
+            <a:r>
+              <a:rPr sz="1650" b="1">
+                <a:solidFill>
+                  <a:srgbClr val="FFFFFF"/>
+                </a:solidFill>
+                <a:latin typeface="Arial"/>
+                <a:ea typeface="Arial"/>
+                <a:cs typeface="Arial"/>
+              </a:rPr>
+              <a:t>环境配置差异</a:t>
+            </a:r>
+          </a:p>
+        </p:txBody>
+      </p:sp>
+      <p:sp>
+        <p:nvSpPr>
+          <p:cNvPr id="13" name="challenge-1-detail">
+            <a:extLst>
+              <a:ext uri="{FF2B5EF4-FFF2-40B4-BE49-F238E27FC236}">
+                <a16:creationId xmlns:a16="http://schemas.microsoft.com/office/drawing/2014/main" id="{48C6DFEC-36E1-4C0C-89C6-D1FC5A51E2C5}"/>
+              </a:ext>
+            </a:extLst>
+          </p:cNvPr>
+          <p:cNvSpPr>
+            <a:spLocks noGrp="1"/>
+          </p:cNvSpPr>
+          <p:nvPr/>
+        </p:nvSpPr>
+        <p:spPr>
+          <a:xfrm>
+            <a:off x="1219200" y="2667000"/>
+            <a:ext cx="4171950" cy="342900"/>
+          </a:xfrm>
+          <a:prstGeom prst="rect">
+            <a:avLst/>
+          </a:prstGeom>
+          <a:noFill/>
+          <a:ln w="0">
+            <a:noFill/>
+            <a:prstDash val="solid"/>
+          </a:ln>
+        </p:spPr>
+        <p:txBody>
+          <a:bodyPr wrap="square" lIns="0" tIns="0" rIns="0" bIns="0" anchor="t">
+            <a:normAutofit fontScale="95544"/>
+          </a:bodyPr>
+          <a:lstStyle/>
+          <a:p>
+            <a:pPr algn="l">
+              <a:lnSpc>
+                <a:spcPct val="108000"/>
+              </a:lnSpc>
+              <a:buNone/>
+              <a:defRPr sz="1275" b="0">
+                <a:solidFill>
+                  <a:srgbClr val="A5AFB4"/>
+                </a:solidFill>
+                <a:latin typeface="Arial"/>
+                <a:ea typeface="Arial"/>
+                <a:cs typeface="Arial"/>
+              </a:defRPr>
+            </a:pPr>
+            <a:r>
+              <a:rPr sz="1275" b="0">
+                <a:solidFill>
+                  <a:srgbClr val="A5AFB4"/>
+                </a:solidFill>
+                <a:latin typeface="Arial"/>
+                <a:ea typeface="Arial"/>
+                <a:cs typeface="Arial"/>
+              </a:rPr>
+              <a:t>Qt、编译器、数据库和依赖版本不同，环境复现占用较多时间</a:t>
+            </a:r>
+          </a:p>
+        </p:txBody>
+      </p:sp>
+      <p:sp>
+        <p:nvSpPr>
+          <p:cNvPr id="17" name="challenge-3-dot">
+            <a:extLst>
+              <a:ext uri="{FF2B5EF4-FFF2-40B4-BE49-F238E27FC236}">
+                <a16:creationId xmlns:a16="http://schemas.microsoft.com/office/drawing/2014/main" id="{33BAFCBF-6EB9-43CB-854B-79BEDB317BF8}"/>
+              </a:ext>
+            </a:extLst>
+          </p:cNvPr>
+          <p:cNvSpPr>
+            <a:spLocks noGrp="1"/>
+          </p:cNvSpPr>
+          <p:nvPr/>
+        </p:nvSpPr>
+        <p:spPr>
+          <a:xfrm>
+            <a:off x="952500" y="3257550"/>
+            <a:ext cx="95250" cy="95250"/>
+          </a:xfrm>
+          <a:prstGeom prst="ellipse">
+            <a:avLst/>
+          </a:prstGeom>
+          <a:solidFill>
+            <a:srgbClr val="FF6B35"/>
+          </a:solidFill>
+          <a:ln w="0">
+            <a:noFill/>
+            <a:prstDash val="solid"/>
+          </a:ln>
+        </p:spPr>
+      </p:sp>
+      <p:sp>
+        <p:nvSpPr>
+          <p:cNvPr id="18" name="challenge-3-heading">
+            <a:extLst>
+              <a:ext uri="{FF2B5EF4-FFF2-40B4-BE49-F238E27FC236}">
+                <a16:creationId xmlns:a16="http://schemas.microsoft.com/office/drawing/2014/main" id="{CF4C572D-BE77-4280-91EF-E44BA6DD7645}"/>
+              </a:ext>
+            </a:extLst>
+          </p:cNvPr>
+          <p:cNvSpPr>
+            <a:spLocks noGrp="1"/>
+          </p:cNvSpPr>
+          <p:nvPr/>
+        </p:nvSpPr>
+        <p:spPr>
+          <a:xfrm>
+            <a:off x="1181100" y="3190875"/>
+            <a:ext cx="4095750" cy="247650"/>
+          </a:xfrm>
+          <a:prstGeom prst="rect">
+            <a:avLst/>
+          </a:prstGeom>
+          <a:noFill/>
+          <a:ln w="0">
+            <a:noFill/>
+            <a:prstDash val="solid"/>
+          </a:ln>
+        </p:spPr>
+        <p:txBody>
+          <a:bodyPr wrap="square" lIns="0" tIns="0" rIns="0" bIns="0" anchor="ctr">
+            <a:normAutofit fontScale="93795"/>
+          </a:bodyPr>
+          <a:lstStyle/>
+          <a:p>
+            <a:pPr algn="l">
+              <a:lnSpc>
+                <a:spcPct val="105000"/>
+              </a:lnSpc>
+              <a:buNone/>
+              <a:defRPr sz="1650" b="1">
+                <a:solidFill>
+                  <a:srgbClr val="FFFFFF"/>
+                </a:solidFill>
+                <a:latin typeface="Arial"/>
+                <a:ea typeface="Arial"/>
+                <a:cs typeface="Arial"/>
+              </a:defRPr>
+            </a:pPr>
+            <a:r>
+              <a:rPr sz="1650" b="1" dirty="0" err="1">
+                <a:solidFill>
+                  <a:srgbClr val="FFFFFF"/>
+                </a:solidFill>
+                <a:latin typeface="Arial"/>
+                <a:ea typeface="Arial"/>
+                <a:cs typeface="Arial"/>
+              </a:rPr>
+              <a:t>公共文件冲突</a:t>
+            </a:r>
+            <a:endParaRPr sz="1650" b="1" dirty="0">
+              <a:solidFill>
+                <a:srgbClr val="FFFFFF"/>
+              </a:solidFill>
+              <a:latin typeface="Arial"/>
+              <a:ea typeface="Arial"/>
+              <a:cs typeface="Arial"/>
+            </a:endParaRPr>
+          </a:p>
+        </p:txBody>
+      </p:sp>
+      <p:sp>
+        <p:nvSpPr>
+          <p:cNvPr id="19" name="challenge-3-detail">
+            <a:extLst>
+              <a:ext uri="{FF2B5EF4-FFF2-40B4-BE49-F238E27FC236}">
+                <a16:creationId xmlns:a16="http://schemas.microsoft.com/office/drawing/2014/main" id="{828B458E-CD44-4FA4-903C-E88FA8E2FB12}"/>
+              </a:ext>
+            </a:extLst>
+          </p:cNvPr>
+          <p:cNvSpPr>
+            <a:spLocks noGrp="1"/>
+          </p:cNvSpPr>
+          <p:nvPr/>
+        </p:nvSpPr>
+        <p:spPr>
+          <a:xfrm>
+            <a:off x="1181100" y="3457575"/>
+            <a:ext cx="4171950" cy="342900"/>
+          </a:xfrm>
+          <a:prstGeom prst="rect">
+            <a:avLst/>
+          </a:prstGeom>
+          <a:noFill/>
+          <a:ln w="0">
+            <a:noFill/>
+            <a:prstDash val="solid"/>
+          </a:ln>
+        </p:spPr>
+        <p:txBody>
+          <a:bodyPr wrap="square" lIns="0" tIns="0" rIns="0" bIns="0" anchor="t">
+            <a:normAutofit/>
+          </a:bodyPr>
+          <a:lstStyle/>
+          <a:p>
+            <a:pPr algn="l">
+              <a:lnSpc>
+                <a:spcPct val="108000"/>
+              </a:lnSpc>
+              <a:buNone/>
+              <a:defRPr sz="1275" b="0">
+                <a:solidFill>
+                  <a:srgbClr val="A5AFB4"/>
+                </a:solidFill>
+                <a:latin typeface="Arial"/>
+                <a:ea typeface="Arial"/>
+                <a:cs typeface="Arial"/>
+              </a:defRPr>
+            </a:pPr>
+            <a:r>
+              <a:rPr sz="1275" b="0">
+                <a:solidFill>
+                  <a:srgbClr val="A5AFB4"/>
+                </a:solidFill>
+                <a:latin typeface="Arial"/>
+                <a:ea typeface="Arial"/>
+                <a:cs typeface="Arial"/>
+              </a:rPr>
+              <a:t>多人修改页面与服务层时，容易覆盖或重复实现</a:t>
+            </a:r>
+          </a:p>
+        </p:txBody>
+      </p:sp>
+      <p:sp>
+        <p:nvSpPr>
+          <p:cNvPr id="20" name="challenge-4-dot">
+            <a:extLst>
+              <a:ext uri="{FF2B5EF4-FFF2-40B4-BE49-F238E27FC236}">
+                <a16:creationId xmlns:a16="http://schemas.microsoft.com/office/drawing/2014/main" id="{F3664682-56DB-45D0-B620-03AA2B425ABE}"/>
+              </a:ext>
+            </a:extLst>
+          </p:cNvPr>
+          <p:cNvSpPr>
+            <a:spLocks noGrp="1"/>
+          </p:cNvSpPr>
+          <p:nvPr/>
+        </p:nvSpPr>
+        <p:spPr>
+          <a:xfrm>
+            <a:off x="1009650" y="4162425"/>
+            <a:ext cx="95250" cy="95250"/>
+          </a:xfrm>
+          <a:prstGeom prst="ellipse">
+            <a:avLst/>
+          </a:prstGeom>
+          <a:solidFill>
+            <a:srgbClr val="FF6B35"/>
+          </a:solidFill>
+          <a:ln w="0">
+            <a:noFill/>
+            <a:prstDash val="solid"/>
+          </a:ln>
+        </p:spPr>
+      </p:sp>
+      <p:sp>
+        <p:nvSpPr>
+          <p:cNvPr id="21" name="challenge-4-heading">
+            <a:extLst>
+              <a:ext uri="{FF2B5EF4-FFF2-40B4-BE49-F238E27FC236}">
+                <a16:creationId xmlns:a16="http://schemas.microsoft.com/office/drawing/2014/main" id="{7A94F9B4-3C38-46E3-BD36-0781E28BFCA6}"/>
+              </a:ext>
+            </a:extLst>
+          </p:cNvPr>
+          <p:cNvSpPr>
+            <a:spLocks noGrp="1"/>
+          </p:cNvSpPr>
+          <p:nvPr/>
+        </p:nvSpPr>
+        <p:spPr>
+          <a:xfrm>
+            <a:off x="1238250" y="4095750"/>
+            <a:ext cx="4095750" cy="247650"/>
+          </a:xfrm>
+          <a:prstGeom prst="rect">
+            <a:avLst/>
+          </a:prstGeom>
+          <a:noFill/>
+          <a:ln w="0">
+            <a:noFill/>
+            <a:prstDash val="solid"/>
+          </a:ln>
+        </p:spPr>
+        <p:txBody>
+          <a:bodyPr wrap="square" lIns="0" tIns="0" rIns="0" bIns="0" anchor="ctr">
+            <a:normAutofit fontScale="93795"/>
+          </a:bodyPr>
+          <a:lstStyle/>
+          <a:p>
+            <a:pPr algn="l">
+              <a:lnSpc>
+                <a:spcPct val="105000"/>
+              </a:lnSpc>
+              <a:buNone/>
+              <a:defRPr sz="1650" b="1">
+                <a:solidFill>
+                  <a:srgbClr val="FFFFFF"/>
+                </a:solidFill>
+                <a:latin typeface="Arial"/>
+                <a:ea typeface="Arial"/>
+                <a:cs typeface="Arial"/>
+              </a:defRPr>
+            </a:pPr>
+            <a:r>
+              <a:rPr sz="1650" b="1" dirty="0" err="1">
+                <a:solidFill>
+                  <a:srgbClr val="FFFFFF"/>
+                </a:solidFill>
+                <a:latin typeface="Arial"/>
+                <a:ea typeface="Arial"/>
+                <a:cs typeface="Arial"/>
+              </a:rPr>
+              <a:t>故障定位跨度大</a:t>
+            </a:r>
+            <a:endParaRPr sz="1650" b="1" dirty="0">
+              <a:solidFill>
+                <a:srgbClr val="FFFFFF"/>
+              </a:solidFill>
+              <a:latin typeface="Arial"/>
+              <a:ea typeface="Arial"/>
+              <a:cs typeface="Arial"/>
+            </a:endParaRPr>
+          </a:p>
+        </p:txBody>
+      </p:sp>
+      <p:sp>
+        <p:nvSpPr>
+          <p:cNvPr id="22" name="challenge-4-detail">
+            <a:extLst>
+              <a:ext uri="{FF2B5EF4-FFF2-40B4-BE49-F238E27FC236}">
+                <a16:creationId xmlns:a16="http://schemas.microsoft.com/office/drawing/2014/main" id="{38223C41-D3FE-497A-8B9A-DAE1F0E4F67D}"/>
+              </a:ext>
+            </a:extLst>
+          </p:cNvPr>
+          <p:cNvSpPr>
+            <a:spLocks noGrp="1"/>
+          </p:cNvSpPr>
+          <p:nvPr/>
+        </p:nvSpPr>
+        <p:spPr>
+          <a:xfrm>
+            <a:off x="1238250" y="4362450"/>
+            <a:ext cx="4171950" cy="342900"/>
+          </a:xfrm>
+          <a:prstGeom prst="rect">
+            <a:avLst/>
+          </a:prstGeom>
+          <a:noFill/>
+          <a:ln w="0">
+            <a:noFill/>
+            <a:prstDash val="solid"/>
+          </a:ln>
+        </p:spPr>
+        <p:txBody>
+          <a:bodyPr wrap="square" lIns="0" tIns="0" rIns="0" bIns="0" anchor="t">
+            <a:normAutofit/>
+          </a:bodyPr>
+          <a:lstStyle/>
+          <a:p>
+            <a:pPr algn="l">
+              <a:lnSpc>
+                <a:spcPct val="108000"/>
+              </a:lnSpc>
+              <a:buNone/>
+              <a:defRPr sz="1275" b="0">
+                <a:solidFill>
+                  <a:srgbClr val="A5AFB4"/>
+                </a:solidFill>
+                <a:latin typeface="Arial"/>
+                <a:ea typeface="Arial"/>
+                <a:cs typeface="Arial"/>
+              </a:defRPr>
+            </a:pPr>
+            <a:r>
+              <a:rPr sz="1275" b="0" dirty="0" err="1">
+                <a:solidFill>
+                  <a:srgbClr val="A5AFB4"/>
+                </a:solidFill>
+                <a:latin typeface="Arial"/>
+                <a:ea typeface="Arial"/>
+                <a:cs typeface="Arial"/>
+              </a:rPr>
+              <a:t>问题可能来自客户端、网络、服务端或数据库</a:t>
+            </a:r>
+            <a:endParaRPr sz="1275" b="0" dirty="0">
+              <a:solidFill>
+                <a:srgbClr val="A5AFB4"/>
+              </a:solidFill>
+              <a:latin typeface="Arial"/>
+              <a:ea typeface="Arial"/>
+              <a:cs typeface="Arial"/>
+            </a:endParaRPr>
+          </a:p>
+        </p:txBody>
+      </p:sp>
+      <p:sp>
+        <p:nvSpPr>
+          <p:cNvPr id="23" name="learning-1-dot">
+            <a:extLst>
+              <a:ext uri="{FF2B5EF4-FFF2-40B4-BE49-F238E27FC236}">
+                <a16:creationId xmlns:a16="http://schemas.microsoft.com/office/drawing/2014/main" id="{56F8B1BE-7743-471F-8748-78507B18EF7D}"/>
+              </a:ext>
+            </a:extLst>
+          </p:cNvPr>
+          <p:cNvSpPr>
+            <a:spLocks noGrp="1"/>
+          </p:cNvSpPr>
+          <p:nvPr/>
+        </p:nvSpPr>
+        <p:spPr>
+          <a:xfrm>
+            <a:off x="6515100" y="2466975"/>
+            <a:ext cx="95250" cy="95250"/>
+          </a:xfrm>
+          <a:prstGeom prst="ellipse">
+            <a:avLst/>
+          </a:prstGeom>
+          <a:solidFill>
+            <a:srgbClr val="08C4B0"/>
+          </a:solidFill>
+          <a:ln w="0">
+            <a:noFill/>
+            <a:prstDash val="solid"/>
+          </a:ln>
+        </p:spPr>
+      </p:sp>
+      <p:sp>
+        <p:nvSpPr>
+          <p:cNvPr id="24" name="learning-1-heading">
+            <a:extLst>
+              <a:ext uri="{FF2B5EF4-FFF2-40B4-BE49-F238E27FC236}">
+                <a16:creationId xmlns:a16="http://schemas.microsoft.com/office/drawing/2014/main" id="{B45C31B7-1803-4952-ABCD-F0D761801916}"/>
+              </a:ext>
+            </a:extLst>
+          </p:cNvPr>
+          <p:cNvSpPr>
+            <a:spLocks noGrp="1"/>
+          </p:cNvSpPr>
+          <p:nvPr/>
+        </p:nvSpPr>
+        <p:spPr>
+          <a:xfrm>
+            <a:off x="6743700" y="2400300"/>
+            <a:ext cx="4095750" cy="247650"/>
+          </a:xfrm>
+          <a:prstGeom prst="rect">
+            <a:avLst/>
+          </a:prstGeom>
+          <a:noFill/>
+          <a:ln w="0">
+            <a:noFill/>
+            <a:prstDash val="solid"/>
+          </a:ln>
+        </p:spPr>
+        <p:txBody>
+          <a:bodyPr wrap="square" lIns="0" tIns="0" rIns="0" bIns="0" anchor="ctr">
+            <a:normAutofit fontScale="93795"/>
+          </a:bodyPr>
+          <a:lstStyle/>
+          <a:p>
+            <a:pPr algn="l">
+              <a:lnSpc>
+                <a:spcPct val="105000"/>
+              </a:lnSpc>
+              <a:buNone/>
+              <a:defRPr sz="1650" b="1">
+                <a:solidFill>
+                  <a:srgbClr val="FFFFFF"/>
+                </a:solidFill>
+                <a:latin typeface="Arial"/>
+                <a:ea typeface="Arial"/>
+                <a:cs typeface="Arial"/>
+              </a:defRPr>
+            </a:pPr>
+            <a:r>
+              <a:rPr sz="1650" b="1">
+                <a:solidFill>
+                  <a:srgbClr val="FFFFFF"/>
+                </a:solidFill>
+                <a:latin typeface="Arial"/>
+                <a:ea typeface="Arial"/>
+                <a:cs typeface="Arial"/>
+              </a:rPr>
+              <a:t>统一环境与配置</a:t>
+            </a:r>
+          </a:p>
+        </p:txBody>
+      </p:sp>
+      <p:sp>
+        <p:nvSpPr>
+          <p:cNvPr id="25" name="learning-1-detail">
+            <a:extLst>
+              <a:ext uri="{FF2B5EF4-FFF2-40B4-BE49-F238E27FC236}">
+                <a16:creationId xmlns:a16="http://schemas.microsoft.com/office/drawing/2014/main" id="{FE26CB42-B4E1-48DA-95AC-87CF9B784BF0}"/>
+              </a:ext>
+            </a:extLst>
+          </p:cNvPr>
+          <p:cNvSpPr>
+            <a:spLocks noGrp="1"/>
+          </p:cNvSpPr>
+          <p:nvPr/>
+        </p:nvSpPr>
+        <p:spPr>
+          <a:xfrm>
+            <a:off x="6743700" y="2667000"/>
+            <a:ext cx="4171950" cy="342900"/>
+          </a:xfrm>
+          <a:prstGeom prst="rect">
+            <a:avLst/>
+          </a:prstGeom>
+          <a:noFill/>
+          <a:ln w="0">
+            <a:noFill/>
+            <a:prstDash val="solid"/>
+          </a:ln>
+        </p:spPr>
+        <p:txBody>
+          <a:bodyPr wrap="square" lIns="0" tIns="0" rIns="0" bIns="0" anchor="t">
+            <a:normAutofit fontScale="91985"/>
+          </a:bodyPr>
+          <a:lstStyle/>
+          <a:p>
+            <a:pPr algn="l">
+              <a:lnSpc>
+                <a:spcPct val="108000"/>
+              </a:lnSpc>
+              <a:buNone/>
+              <a:defRPr sz="1275" b="0">
+                <a:solidFill>
+                  <a:srgbClr val="A5AFB4"/>
+                </a:solidFill>
+                <a:latin typeface="Arial"/>
+                <a:ea typeface="Arial"/>
+                <a:cs typeface="Arial"/>
+              </a:defRPr>
+            </a:pPr>
+            <a:r>
+              <a:rPr sz="1275" b="0">
+                <a:solidFill>
+                  <a:srgbClr val="A5AFB4"/>
+                </a:solidFill>
+                <a:latin typeface="Arial"/>
+                <a:ea typeface="Arial"/>
+                <a:cs typeface="Arial"/>
+              </a:rPr>
+              <a:t>固定依赖版本，集中管理接口地址、数据库连接和地图密钥</a:t>
+            </a:r>
+          </a:p>
+        </p:txBody>
+      </p:sp>
+      <p:sp>
+        <p:nvSpPr>
+          <p:cNvPr id="26" name="learning-2-dot">
+            <a:extLst>
+              <a:ext uri="{FF2B5EF4-FFF2-40B4-BE49-F238E27FC236}">
+                <a16:creationId xmlns:a16="http://schemas.microsoft.com/office/drawing/2014/main" id="{F48CECC4-6FFD-43DE-AEA8-3916DC75D335}"/>
+              </a:ext>
+            </a:extLst>
+          </p:cNvPr>
+          <p:cNvSpPr>
+            <a:spLocks noGrp="1"/>
+          </p:cNvSpPr>
+          <p:nvPr/>
+        </p:nvSpPr>
+        <p:spPr>
+          <a:xfrm>
+            <a:off x="6515100" y="3190875"/>
+            <a:ext cx="95250" cy="95250"/>
+          </a:xfrm>
+          <a:prstGeom prst="ellipse">
+            <a:avLst/>
+          </a:prstGeom>
+          <a:solidFill>
+            <a:srgbClr val="08C4B0"/>
+          </a:solidFill>
+          <a:ln w="0">
+            <a:noFill/>
+            <a:prstDash val="solid"/>
+          </a:ln>
+        </p:spPr>
+      </p:sp>
+      <p:sp>
+        <p:nvSpPr>
+          <p:cNvPr id="27" name="learning-2-heading">
+            <a:extLst>
+              <a:ext uri="{FF2B5EF4-FFF2-40B4-BE49-F238E27FC236}">
+                <a16:creationId xmlns:a16="http://schemas.microsoft.com/office/drawing/2014/main" id="{05925A59-9F13-4942-B2FB-5EBCC32B2048}"/>
+              </a:ext>
+            </a:extLst>
+          </p:cNvPr>
+          <p:cNvSpPr>
+            <a:spLocks noGrp="1"/>
+          </p:cNvSpPr>
+          <p:nvPr/>
+        </p:nvSpPr>
+        <p:spPr>
+          <a:xfrm>
+            <a:off x="6743700" y="3124200"/>
+            <a:ext cx="4095750" cy="247650"/>
+          </a:xfrm>
+          <a:prstGeom prst="rect">
+            <a:avLst/>
+          </a:prstGeom>
+          <a:noFill/>
+          <a:ln w="0">
+            <a:noFill/>
+            <a:prstDash val="solid"/>
+          </a:ln>
+        </p:spPr>
+        <p:txBody>
+          <a:bodyPr wrap="square" lIns="0" tIns="0" rIns="0" bIns="0" anchor="ctr">
+            <a:normAutofit fontScale="93795"/>
+          </a:bodyPr>
+          <a:lstStyle/>
+          <a:p>
+            <a:pPr algn="l">
+              <a:lnSpc>
+                <a:spcPct val="105000"/>
+              </a:lnSpc>
+              <a:buNone/>
+              <a:defRPr sz="1650" b="1">
+                <a:solidFill>
+                  <a:srgbClr val="FFFFFF"/>
+                </a:solidFill>
+                <a:latin typeface="Arial"/>
+                <a:ea typeface="Arial"/>
+                <a:cs typeface="Arial"/>
+              </a:defRPr>
+            </a:pPr>
+            <a:r>
+              <a:rPr sz="1650" b="1">
+                <a:solidFill>
+                  <a:srgbClr val="FFFFFF"/>
+                </a:solidFill>
+                <a:latin typeface="Arial"/>
+                <a:ea typeface="Arial"/>
+                <a:cs typeface="Arial"/>
+              </a:rPr>
+              <a:t>以 API 文档约定协作</a:t>
+            </a:r>
+          </a:p>
+        </p:txBody>
+      </p:sp>
+      <p:sp>
+        <p:nvSpPr>
+          <p:cNvPr id="28" name="learning-2-detail">
+            <a:extLst>
+              <a:ext uri="{FF2B5EF4-FFF2-40B4-BE49-F238E27FC236}">
+                <a16:creationId xmlns:a16="http://schemas.microsoft.com/office/drawing/2014/main" id="{6BBA6332-0C38-446A-8352-01BFE15D667A}"/>
+              </a:ext>
+            </a:extLst>
+          </p:cNvPr>
+          <p:cNvSpPr>
+            <a:spLocks noGrp="1"/>
+          </p:cNvSpPr>
+          <p:nvPr/>
+        </p:nvSpPr>
+        <p:spPr>
+          <a:xfrm>
+            <a:off x="6743700" y="3390900"/>
+            <a:ext cx="4171950" cy="342900"/>
+          </a:xfrm>
+          <a:prstGeom prst="rect">
+            <a:avLst/>
+          </a:prstGeom>
+          <a:noFill/>
+          <a:ln w="0">
+            <a:noFill/>
+            <a:prstDash val="solid"/>
+          </a:ln>
+        </p:spPr>
+        <p:txBody>
+          <a:bodyPr wrap="square" lIns="0" tIns="0" rIns="0" bIns="0" anchor="t">
+            <a:normAutofit/>
+          </a:bodyPr>
+          <a:lstStyle/>
+          <a:p>
+            <a:pPr algn="l">
+              <a:lnSpc>
+                <a:spcPct val="108000"/>
+              </a:lnSpc>
+              <a:buNone/>
+              <a:defRPr sz="1275" b="0">
+                <a:solidFill>
+                  <a:srgbClr val="A5AFB4"/>
+                </a:solidFill>
+                <a:latin typeface="Arial"/>
+                <a:ea typeface="Arial"/>
+                <a:cs typeface="Arial"/>
+              </a:defRPr>
+            </a:pPr>
+            <a:r>
+              <a:rPr sz="1275" b="0">
+                <a:solidFill>
+                  <a:srgbClr val="A5AFB4"/>
+                </a:solidFill>
+                <a:latin typeface="Arial"/>
+                <a:ea typeface="Arial"/>
+                <a:cs typeface="Arial"/>
+              </a:rPr>
+              <a:t>明确请求参数、响应字段和错误处理，减少口头同步</a:t>
+            </a:r>
+          </a:p>
+        </p:txBody>
+      </p:sp>
+      <p:sp>
+        <p:nvSpPr>
+          <p:cNvPr id="32" name="learning-4-dot">
+            <a:extLst>
+              <a:ext uri="{FF2B5EF4-FFF2-40B4-BE49-F238E27FC236}">
+                <a16:creationId xmlns:a16="http://schemas.microsoft.com/office/drawing/2014/main" id="{F7C17538-6E30-4D8C-B59A-90FE1F6E7561}"/>
+              </a:ext>
+            </a:extLst>
+          </p:cNvPr>
+          <p:cNvSpPr>
+            <a:spLocks noGrp="1"/>
+          </p:cNvSpPr>
+          <p:nvPr/>
+        </p:nvSpPr>
+        <p:spPr>
+          <a:xfrm>
+            <a:off x="6553200" y="3990975"/>
+            <a:ext cx="95250" cy="95250"/>
+          </a:xfrm>
+          <a:prstGeom prst="ellipse">
+            <a:avLst/>
+          </a:prstGeom>
+          <a:solidFill>
+            <a:srgbClr val="08C4B0"/>
+          </a:solidFill>
+          <a:ln w="0">
+            <a:noFill/>
+            <a:prstDash val="solid"/>
+          </a:ln>
+        </p:spPr>
+      </p:sp>
+      <p:sp>
+        <p:nvSpPr>
+          <p:cNvPr id="33" name="learning-4-heading">
+            <a:extLst>
+              <a:ext uri="{FF2B5EF4-FFF2-40B4-BE49-F238E27FC236}">
+                <a16:creationId xmlns:a16="http://schemas.microsoft.com/office/drawing/2014/main" id="{DD06E0EF-4DD0-4E33-91D3-4AB0DCFB4F15}"/>
+              </a:ext>
+            </a:extLst>
+          </p:cNvPr>
+          <p:cNvSpPr>
+            <a:spLocks noGrp="1"/>
+          </p:cNvSpPr>
+          <p:nvPr/>
+        </p:nvSpPr>
+        <p:spPr>
+          <a:xfrm>
+            <a:off x="6781800" y="3924300"/>
+            <a:ext cx="4095750" cy="247650"/>
+          </a:xfrm>
+          <a:prstGeom prst="rect">
+            <a:avLst/>
+          </a:prstGeom>
+          <a:noFill/>
+          <a:ln w="0">
+            <a:noFill/>
+            <a:prstDash val="solid"/>
+          </a:ln>
+        </p:spPr>
+        <p:txBody>
+          <a:bodyPr wrap="square" lIns="0" tIns="0" rIns="0" bIns="0" anchor="ctr">
+            <a:normAutofit fontScale="93795"/>
+          </a:bodyPr>
+          <a:lstStyle/>
+          <a:p>
+            <a:pPr algn="l">
+              <a:lnSpc>
+                <a:spcPct val="105000"/>
+              </a:lnSpc>
+              <a:buNone/>
+              <a:defRPr sz="1650" b="1">
+                <a:solidFill>
+                  <a:srgbClr val="FFFFFF"/>
+                </a:solidFill>
+                <a:latin typeface="Arial"/>
+                <a:ea typeface="Arial"/>
+                <a:cs typeface="Arial"/>
+              </a:defRPr>
+            </a:pPr>
+            <a:r>
+              <a:rPr sz="1650" b="1" dirty="0" err="1">
+                <a:solidFill>
+                  <a:srgbClr val="FFFFFF"/>
+                </a:solidFill>
+                <a:latin typeface="Arial"/>
+                <a:ea typeface="Arial"/>
+                <a:cs typeface="Arial"/>
+              </a:rPr>
+              <a:t>形成联调排查链路</a:t>
+            </a:r>
+            <a:endParaRPr sz="1650" b="1" dirty="0">
+              <a:solidFill>
+                <a:srgbClr val="FFFFFF"/>
+              </a:solidFill>
+              <a:latin typeface="Arial"/>
+              <a:ea typeface="Arial"/>
+              <a:cs typeface="Arial"/>
+            </a:endParaRPr>
+          </a:p>
+        </p:txBody>
+      </p:sp>
+      <p:sp>
+        <p:nvSpPr>
+          <p:cNvPr id="34" name="learning-4-detail">
+            <a:extLst>
+              <a:ext uri="{FF2B5EF4-FFF2-40B4-BE49-F238E27FC236}">
+                <a16:creationId xmlns:a16="http://schemas.microsoft.com/office/drawing/2014/main" id="{53F31D63-CE2A-4C06-B747-B4124D3A175D}"/>
+              </a:ext>
+            </a:extLst>
+          </p:cNvPr>
+          <p:cNvSpPr>
+            <a:spLocks noGrp="1"/>
+          </p:cNvSpPr>
+          <p:nvPr/>
+        </p:nvSpPr>
+        <p:spPr>
+          <a:xfrm>
+            <a:off x="6781800" y="4191000"/>
+            <a:ext cx="4171950" cy="342900"/>
+          </a:xfrm>
+          <a:prstGeom prst="rect">
+            <a:avLst/>
+          </a:prstGeom>
+          <a:noFill/>
+          <a:ln w="0">
+            <a:noFill/>
+            <a:prstDash val="solid"/>
+          </a:ln>
+        </p:spPr>
+        <p:txBody>
+          <a:bodyPr wrap="square" lIns="0" tIns="0" rIns="0" bIns="0" anchor="t">
+            <a:normAutofit/>
+          </a:bodyPr>
+          <a:lstStyle/>
+          <a:p>
+            <a:pPr algn="l">
+              <a:lnSpc>
+                <a:spcPct val="108000"/>
+              </a:lnSpc>
+              <a:buNone/>
+              <a:defRPr sz="1275" b="0">
+                <a:solidFill>
+                  <a:srgbClr val="A5AFB4"/>
+                </a:solidFill>
+                <a:latin typeface="Arial"/>
+                <a:ea typeface="Arial"/>
+                <a:cs typeface="Arial"/>
+              </a:defRPr>
+            </a:pPr>
+            <a:r>
+              <a:rPr sz="1275" b="0">
+                <a:solidFill>
+                  <a:srgbClr val="A5AFB4"/>
+                </a:solidFill>
+                <a:latin typeface="Arial"/>
+                <a:ea typeface="Arial"/>
+                <a:cs typeface="Arial"/>
+              </a:rPr>
+              <a:t>结合客户端日志、服务端日志和数据库状态定位问题</a:t>
+            </a:r>
+          </a:p>
+        </p:txBody>
+      </p:sp>
+      <p:sp>
+        <p:nvSpPr>
+          <p:cNvPr id="35" name="challenge-summary">
+            <a:extLst>
+              <a:ext uri="{FF2B5EF4-FFF2-40B4-BE49-F238E27FC236}">
+                <a16:creationId xmlns:a16="http://schemas.microsoft.com/office/drawing/2014/main" id="{A1725791-553B-4AFD-9E85-A519C66860C2}"/>
+              </a:ext>
+            </a:extLst>
+          </p:cNvPr>
+          <p:cNvSpPr>
+            <a:spLocks noGrp="1"/>
+          </p:cNvSpPr>
+          <p:nvPr/>
+        </p:nvSpPr>
+        <p:spPr>
+          <a:xfrm>
+            <a:off x="762000" y="5638800"/>
+            <a:ext cx="10668000" cy="495300"/>
+          </a:xfrm>
+          <a:prstGeom prst="roundRect">
+            <a:avLst>
+              <a:gd name="adj" fmla="val 19231"/>
+            </a:avLst>
+          </a:prstGeom>
+          <a:solidFill>
+            <a:srgbClr val="FF6B35"/>
+          </a:solidFill>
+          <a:ln w="0">
+            <a:noFill/>
+            <a:prstDash val="solid"/>
+          </a:ln>
+        </p:spPr>
+      </p:sp>
+      <p:sp>
+        <p:nvSpPr>
+          <p:cNvPr id="36" name="challenge-summary-text">
+            <a:extLst>
+              <a:ext uri="{FF2B5EF4-FFF2-40B4-BE49-F238E27FC236}">
+                <a16:creationId xmlns:a16="http://schemas.microsoft.com/office/drawing/2014/main" id="{B135AC85-AD4A-4B1D-BEC8-5AEF1A239D93}"/>
+              </a:ext>
+            </a:extLst>
+          </p:cNvPr>
+          <p:cNvSpPr>
+            <a:spLocks noGrp="1"/>
+          </p:cNvSpPr>
+          <p:nvPr/>
+        </p:nvSpPr>
+        <p:spPr>
+          <a:xfrm>
+            <a:off x="1009650" y="5638800"/>
+            <a:ext cx="10172700" cy="495300"/>
+          </a:xfrm>
+          <a:prstGeom prst="rect">
+            <a:avLst/>
+          </a:prstGeom>
+          <a:noFill/>
+          <a:ln w="0">
+            <a:noFill/>
+            <a:prstDash val="solid"/>
+          </a:ln>
+        </p:spPr>
+        <p:txBody>
+          <a:bodyPr wrap="square" lIns="0" tIns="0" rIns="0" bIns="0" anchor="ctr">
+            <a:normAutofit/>
+          </a:bodyPr>
+          <a:lstStyle/>
+          <a:p>
+            <a:pPr algn="ctr">
+              <a:lnSpc>
+                <a:spcPct val="105000"/>
+              </a:lnSpc>
+              <a:buNone/>
+              <a:defRPr sz="1725" b="1">
+                <a:solidFill>
+                  <a:srgbClr val="10161B"/>
+                </a:solidFill>
+                <a:latin typeface="Arial"/>
+                <a:ea typeface="Arial"/>
+                <a:cs typeface="Arial"/>
+              </a:defRPr>
+            </a:pPr>
+            <a:r>
+              <a:rPr sz="1725" b="1">
+                <a:solidFill>
+                  <a:srgbClr val="10161B"/>
+                </a:solidFill>
+                <a:latin typeface="Arial"/>
+                <a:ea typeface="Arial"/>
+                <a:cs typeface="Arial"/>
+              </a:rPr>
+              <a:t>统一配置、接口文档和分层协作，直接影响团队的联调效率</a:t>
+            </a:r>
+          </a:p>
+        </p:txBody>
+      </p:sp>
+      <p:sp>
+        <p:nvSpPr>
+          <p:cNvPr id="37" name="challenge-footer-divider">
+            <a:extLst>
+              <a:ext uri="{FF2B5EF4-FFF2-40B4-BE49-F238E27FC236}">
+                <a16:creationId xmlns:a16="http://schemas.microsoft.com/office/drawing/2014/main" id="{9ABBF5E3-4E50-4469-B62E-F4ED6E660FA7}"/>
+              </a:ext>
+            </a:extLst>
+          </p:cNvPr>
+          <p:cNvSpPr>
+            <a:spLocks noGrp="1"/>
+          </p:cNvSpPr>
+          <p:nvPr/>
+        </p:nvSpPr>
+        <p:spPr>
+          <a:xfrm>
+            <a:off x="609600" y="6438900"/>
+            <a:ext cx="10972800" cy="14288"/>
+          </a:xfrm>
+          <a:prstGeom prst="rect">
+            <a:avLst/>
+          </a:prstGeom>
+          <a:solidFill>
+            <a:srgbClr val="344249"/>
+          </a:solidFill>
+          <a:ln w="0">
+            <a:noFill/>
+            <a:prstDash val="solid"/>
+          </a:ln>
+        </p:spPr>
+      </p:sp>
+      <p:sp>
+        <p:nvSpPr>
+          <p:cNvPr id="38" name="challenge-footer-title">
+            <a:extLst>
+              <a:ext uri="{FF2B5EF4-FFF2-40B4-BE49-F238E27FC236}">
+                <a16:creationId xmlns:a16="http://schemas.microsoft.com/office/drawing/2014/main" id="{A3DF6673-5DD6-495D-B945-B8740BD69A59}"/>
+              </a:ext>
+            </a:extLst>
+          </p:cNvPr>
+          <p:cNvSpPr>
+            <a:spLocks noGrp="1"/>
+          </p:cNvSpPr>
+          <p:nvPr/>
+        </p:nvSpPr>
+        <p:spPr>
+          <a:xfrm>
+            <a:off x="609600" y="6534150"/>
+            <a:ext cx="4572000" cy="171450"/>
+          </a:xfrm>
+          <a:prstGeom prst="rect">
+            <a:avLst/>
+          </a:prstGeom>
+          <a:noFill/>
+          <a:ln w="0">
+            <a:noFill/>
+            <a:prstDash val="solid"/>
+          </a:ln>
+        </p:spPr>
+        <p:txBody>
+          <a:bodyPr wrap="square" lIns="0" tIns="0" rIns="0" bIns="0" anchor="ctr">
+            <a:normAutofit/>
+          </a:bodyPr>
+          <a:lstStyle/>
+          <a:p>
+            <a:pPr algn="l">
+              <a:lnSpc>
+                <a:spcPct val="105000"/>
+              </a:lnSpc>
+              <a:buNone/>
+              <a:defRPr sz="1050" b="0">
+                <a:solidFill>
+                  <a:srgbClr val="A5AFB4"/>
+                </a:solidFill>
+                <a:latin typeface="Arial"/>
+                <a:ea typeface="Arial"/>
+                <a:cs typeface="Arial"/>
+              </a:defRPr>
+            </a:pPr>
+            <a:r>
+              <a:rPr sz="1050" b="0">
+                <a:solidFill>
+                  <a:srgbClr val="A5AFB4"/>
+                </a:solidFill>
+                <a:latin typeface="Arial"/>
+                <a:ea typeface="Arial"/>
+                <a:cs typeface="Arial"/>
+              </a:rPr>
+              <a:t>电动汽车充电运营管理平台</a:t>
+            </a:r>
+          </a:p>
+        </p:txBody>
+      </p:sp>
+      <p:sp>
+        <p:nvSpPr>
+          <p:cNvPr id="39" name="challenge-footer-team">
+            <a:extLst>
+              <a:ext uri="{FF2B5EF4-FFF2-40B4-BE49-F238E27FC236}">
+                <a16:creationId xmlns:a16="http://schemas.microsoft.com/office/drawing/2014/main" id="{BBD6F4EA-66A7-4908-BC60-C5B24DF5FF63}"/>
+              </a:ext>
+            </a:extLst>
+          </p:cNvPr>
+          <p:cNvSpPr>
+            <a:spLocks noGrp="1"/>
+          </p:cNvSpPr>
+          <p:nvPr/>
+        </p:nvSpPr>
+        <p:spPr>
+          <a:xfrm>
+            <a:off x="10287000" y="6534150"/>
+            <a:ext cx="1295400" cy="171450"/>
+          </a:xfrm>
+          <a:prstGeom prst="rect">
+            <a:avLst/>
+          </a:prstGeom>
+          <a:noFill/>
+          <a:ln w="0">
+            <a:noFill/>
+            <a:prstDash val="solid"/>
+          </a:ln>
+        </p:spPr>
+        <p:txBody>
+          <a:bodyPr wrap="square" lIns="0" tIns="0" rIns="0" bIns="0" anchor="ctr">
+            <a:normAutofit/>
+          </a:bodyPr>
+          <a:lstStyle/>
+          <a:p>
+            <a:pPr algn="r">
+              <a:lnSpc>
+                <a:spcPct val="105000"/>
+              </a:lnSpc>
+              <a:buNone/>
+              <a:defRPr sz="1050" b="0">
+                <a:solidFill>
+                  <a:srgbClr val="A5AFB4"/>
+                </a:solidFill>
+                <a:latin typeface="Arial"/>
+                <a:ea typeface="Arial"/>
+                <a:cs typeface="Arial"/>
+              </a:defRPr>
+            </a:pPr>
+            <a:r>
+              <a:rPr sz="1050" b="0">
+                <a:solidFill>
+                  <a:srgbClr val="A5AFB4"/>
+                </a:solidFill>
+                <a:latin typeface="Arial"/>
+                <a:ea typeface="Arial"/>
+                <a:cs typeface="Arial"/>
+              </a:rPr>
+              <a:t>第四组</a:t>
+            </a:r>
+          </a:p>
+        </p:txBody>
+      </p:sp>
+    </p:spTree>
+    <p:extLst>
+      <p:ext uri="{BB962C8B-B14F-4D97-AF65-F5344CB8AC3E}">
+        <p14:creationId xmlns:p14="http://schemas.microsoft.com/office/powerpoint/2010/main" val="1115608405"/>
+      </p:ext>
+    </p:extLst>
+  </p:cSld>
+  <p:clrMapOvr>
+    <a:masterClrMapping/>
+  </p:clrMapOvr>
+</p:sld>
+</file>
+
+<file path=ppt/slides/slide13.xml><?xml version="1.0" encoding="utf-8"?>
 <p:sld xmlns:a="http://schemas.openxmlformats.org/drawingml/2006/main" xmlns:r="http://schemas.openxmlformats.org/officeDocument/2006/relationships" xmlns:p="http://schemas.openxmlformats.org/presentationml/2006/main">
   <p:cSld>
     <p:bg>
@@ -6162,7 +8796,7 @@
                 <a:latin typeface="Arial" panose="020B0604020202020204" pitchFamily="34" charset="0"/>
                 <a:cs typeface="Arial" panose="020B0604020202020204" pitchFamily="34" charset="0"/>
               </a:rPr>
-              <a:t>、Qt WebEngine、Qt WebSockets；</a:t>
+              <a:t>、Qt WebEngine；</a:t>
             </a:r>
             <a:endParaRPr lang="en-US" altLang="zh-CN" sz="2000" dirty="0">
               <a:solidFill>
@@ -6205,7 +8839,7 @@
               <a:t>17 </a:t>
             </a:r>
             <a:r>
-              <a:rPr lang="zh-CN" altLang="en-US" sz="2000">
+              <a:rPr lang="zh-CN" altLang="en-US" sz="2000" dirty="0">
                 <a:solidFill>
                   <a:srgbClr val="FFFFFF"/>
                 </a:solidFill>
@@ -6215,24 +8849,14 @@
               <a:t>、</a:t>
             </a:r>
             <a:r>
-              <a:rPr lang="zh-CN" altLang="zh-CN" sz="2000">
+              <a:rPr lang="zh-CN" altLang="zh-CN" sz="2000" dirty="0">
                 <a:solidFill>
                   <a:srgbClr val="FFFFFF"/>
                 </a:solidFill>
                 <a:latin typeface="Arial" panose="020B0604020202020204" pitchFamily="34" charset="0"/>
                 <a:cs typeface="Arial" panose="020B0604020202020204" pitchFamily="34" charset="0"/>
               </a:rPr>
-              <a:t>Q</a:t>
-            </a:r>
-            <a:r>
-              <a:rPr lang="zh-CN" altLang="zh-CN" sz="2000" dirty="0">
-                <a:solidFill>
-                  <a:srgbClr val="FFFFFF"/>
-                </a:solidFill>
-                <a:latin typeface="Arial" panose="020B0604020202020204" pitchFamily="34" charset="0"/>
-                <a:cs typeface="Arial" panose="020B0604020202020204" pitchFamily="34" charset="0"/>
-              </a:rPr>
-              <a:t>t Widgets、Qt Charts、Qt Network；</a:t>
+              <a:t>Qt Widgets、Qt Charts、Qt Network；</a:t>
             </a:r>
             <a:endParaRPr lang="en-US" altLang="zh-CN" sz="2000" dirty="0">
               <a:solidFill>
@@ -6356,10 +8980,10 @@
       </p:sp>
       <p:pic>
         <p:nvPicPr>
-          <p:cNvPr id="5" name="图片 4">
-            <a:extLst>
-              <a:ext uri="{FF2B5EF4-FFF2-40B4-BE49-F238E27FC236}">
-                <a16:creationId xmlns:a16="http://schemas.microsoft.com/office/drawing/2014/main" id="{89C4696F-61B7-78B6-432C-EDE385918BB6}"/>
+          <p:cNvPr id="6" name="图片 5">
+            <a:extLst>
+              <a:ext uri="{FF2B5EF4-FFF2-40B4-BE49-F238E27FC236}">
+                <a16:creationId xmlns:a16="http://schemas.microsoft.com/office/drawing/2014/main" id="{A25A43CB-460F-4534-5162-0078E75A48A7}"/>
               </a:ext>
             </a:extLst>
           </p:cNvPr>
@@ -6376,8 +9000,8 @@
         </p:blipFill>
         <p:spPr>
           <a:xfrm>
-            <a:off x="5528416" y="1447801"/>
-            <a:ext cx="5720609" cy="4636445"/>
+            <a:off x="5181600" y="2078680"/>
+            <a:ext cx="5921639" cy="3329289"/>
           </a:xfrm>
           <a:prstGeom prst="rect">
             <a:avLst/>
@@ -6806,7 +9430,7 @@
         </p:nvSpPr>
         <p:spPr>
           <a:xfrm>
-            <a:off x="2857500" y="2415922"/>
+            <a:off x="2857500" y="2412590"/>
             <a:ext cx="7048500" cy="266700"/>
           </a:xfrm>
           <a:prstGeom prst="rect">
@@ -6863,7 +9487,7 @@
                 <a:ea typeface="Arial"/>
                 <a:cs typeface="Arial"/>
               </a:rPr>
-              <a:t>设计</a:t>
+              <a:t>设计，管理端充电桩类型功率完善</a:t>
             </a:r>
             <a:endParaRPr dirty="0">
               <a:solidFill>
@@ -7355,7 +9979,7 @@
                 <a:latin typeface="Arial"/>
                 <a:cs typeface="Arial"/>
               </a:rPr>
-              <a:t>后端技术选型和开发，客户端充电业务完善</a:t>
+              <a:t>后端技术选型和开发，客户端充电业务、历史订单完善</a:t>
             </a:r>
             <a:endParaRPr dirty="0">
               <a:solidFill>
@@ -7512,7 +10136,27 @@
                 <a:latin typeface="Arial"/>
                 <a:cs typeface="Arial"/>
               </a:rPr>
-              <a:t>后端，管理端充电桩管理优化和充电站地址</a:t>
+              <a:t>后端，管理端充电桩管理优化和充电站地址，实时充电</a:t>
+            </a:r>
+            <a:r>
+              <a:rPr lang="en-US" altLang="zh-CN" dirty="0">
+                <a:solidFill>
+                  <a:schemeClr val="bg1"/>
+                </a:solidFill>
+                <a:latin typeface="Arial"/>
+                <a:cs typeface="Arial"/>
+              </a:rPr>
+              <a:t>Socket</a:t>
+            </a:r>
+            <a:r>
+              <a:rPr lang="zh-CN" altLang="en-US" dirty="0">
+                <a:solidFill>
+                  <a:schemeClr val="bg1"/>
+                </a:solidFill>
+                <a:latin typeface="Arial"/>
+                <a:cs typeface="Arial"/>
+              </a:rPr>
+              <a:t>通信</a:t>
             </a:r>
             <a:endParaRPr dirty="0">
               <a:solidFill>
@@ -9729,6 +12373,17 @@
               </a:defRPr>
             </a:pPr>
             <a:r>
+              <a:rPr lang="zh-CN" altLang="en-US" sz="1425" b="0" dirty="0">
+                <a:solidFill>
+                  <a:srgbClr val="FFFFFF"/>
+                </a:solidFill>
+                <a:latin typeface="Arial"/>
+                <a:ea typeface="Arial"/>
+                <a:cs typeface="Arial"/>
+              </a:rPr>
+              <a:t>自定义</a:t>
+            </a:r>
+            <a:r>
               <a:rPr sz="1425" b="0" dirty="0">
                 <a:solidFill>
                   <a:srgbClr val="FFFFFF"/>
@@ -9737,7 +12392,7 @@
                 <a:ea typeface="Arial"/>
                 <a:cs typeface="Arial"/>
               </a:rPr>
-              <a:t>WebSocket </a:t>
+              <a:t>Socket </a:t>
             </a:r>
             <a:r>
               <a:rPr sz="1425" b="0" dirty="0" err="1">
